--- a/presentation/REGIME-X_Final_Presentation.pptx
+++ b/presentation/REGIME-X_Final_Presentation.pptx
@@ -21,9 +21,10 @@
     <p:sldId id="269" r:id="rId15"/>
     <p:sldId id="270" r:id="rId16"/>
     <p:sldId id="271" r:id="rId17"/>
+    <p:sldId id="272" r:id="rId18"/>
   </p:sldIdLst>
   <p:notesMasterIdLst>
-    <p:notesMasterId r:id="rId18"/>
+    <p:notesMasterId r:id="rId19"/>
   </p:notesMasterIdLst>
   <p:sldSz cx="9144000" cy="5143500"/>
   <p:notesSz cx="5143500" cy="9144000"/>
@@ -122,7 +123,7 @@
   <p:extLst>
     <p:ext uri="{521415D9-36F7-43E2-AB2F-B90AF26B5E84}">
       <p14:sectionLst xmlns:p14="http://schemas.microsoft.com/office/powerpoint/2010/main">
-        <p14:section name="Main talk" id="{9792f247-1a9d-8b3d-46e6-a1b6c53970a1}">
+        <p14:section name="Main talk" id="{34996806-7f7f-925d-798b-4d078d689515}">
           <p14:sldIdLst>
             <p14:sldId id="256"/>
             <p14:sldId id="257"/>
@@ -134,7 +135,7 @@
             <p14:sldId id="263"/>
           </p14:sldIdLst>
         </p14:section>
-        <p14:section name="Backup" id="{8e3afbd1-9027-f803-a18a-32548e383c2c}">
+        <p14:section name="Backup" id="{bd3553bb-63fa-ef15-cd0c-bca7f827dbcc}">
           <p14:sldIdLst>
             <p14:sldId id="264"/>
             <p14:sldId id="265"/>
@@ -144,6 +145,7 @@
             <p14:sldId id="269"/>
             <p14:sldId id="270"/>
             <p14:sldId id="271"/>
+            <p14:sldId id="272"/>
           </p14:sldIdLst>
         </p14:section>
       </p14:sectionLst>
@@ -2843,7 +2845,7 @@
               <c:strCache>
                 <c:ptCount val="1"/>
                 <c:pt idx="0">
-                  <c:v>Our strategy</c:v>
+                  <c:v>Our causal engine</c:v>
                 </c:pt>
               </c:strCache>
             </c:strRef>
@@ -3070,154 +3072,154 @@
                 <c:formatCode>General</c:formatCode>
                 <c:ptCount val="50"/>
                 <c:pt idx="0">
-                  <c:v>0.98231</c:v>
+                  <c:v>1.03856</c:v>
                 </c:pt>
                 <c:pt idx="1">
-                  <c:v>1.01528</c:v>
+                  <c:v>0.98448</c:v>
                 </c:pt>
                 <c:pt idx="2">
-                  <c:v>1.00444</c:v>
+                  <c:v>0.97751</c:v>
                 </c:pt>
                 <c:pt idx="3">
-                  <c:v>1.01625</c:v>
+                  <c:v>0.97725</c:v>
                 </c:pt>
                 <c:pt idx="4">
-                  <c:v>1.01616</c:v>
+                  <c:v>0.98757</c:v>
                 </c:pt>
                 <c:pt idx="5">
-                  <c:v>1.02751</c:v>
+                  <c:v>0.9862</c:v>
                 </c:pt>
                 <c:pt idx="6">
-                  <c:v>1.02605</c:v>
+                  <c:v>0.99307</c:v>
                 </c:pt>
                 <c:pt idx="7">
-                  <c:v>1.0343</c:v>
+                  <c:v>1.00063</c:v>
                 </c:pt>
                 <c:pt idx="8">
-                  <c:v>1.04389</c:v>
+                  <c:v>1.00629</c:v>
                 </c:pt>
                 <c:pt idx="9">
-                  <c:v>1.05055</c:v>
+                  <c:v>1.01409</c:v>
                 </c:pt>
                 <c:pt idx="10">
-                  <c:v>1.05938</c:v>
+                  <c:v>0.99474</c:v>
                 </c:pt>
                 <c:pt idx="11">
-                  <c:v>1.03809</c:v>
+                  <c:v>0.98505</c:v>
                 </c:pt>
                 <c:pt idx="12">
-                  <c:v>1.02787</c:v>
+                  <c:v>0.97831</c:v>
                 </c:pt>
                 <c:pt idx="13">
-                  <c:v>1.02081</c:v>
+                  <c:v>0.98831</c:v>
                 </c:pt>
                 <c:pt idx="14">
-                  <c:v>1.03122</c:v>
+                  <c:v>0.97556</c:v>
                 </c:pt>
                 <c:pt idx="15">
-                  <c:v>1.01792</c:v>
+                  <c:v>0.97041</c:v>
                 </c:pt>
                 <c:pt idx="16">
-                  <c:v>1.01264</c:v>
+                  <c:v>0.97572</c:v>
                 </c:pt>
                 <c:pt idx="17">
-                  <c:v>1.01812</c:v>
+                  <c:v>0.98102</c:v>
                 </c:pt>
                 <c:pt idx="18">
-                  <c:v>1.02365</c:v>
+                  <c:v>1.00357</c:v>
                 </c:pt>
                 <c:pt idx="19">
-                  <c:v>1.04717</c:v>
+                  <c:v>1.00558</c:v>
                 </c:pt>
                 <c:pt idx="20">
-                  <c:v>1.04919</c:v>
+                  <c:v>0.98791</c:v>
                 </c:pt>
                 <c:pt idx="21">
-                  <c:v>1.03081</c:v>
+                  <c:v>0.99451</c:v>
                 </c:pt>
                 <c:pt idx="22">
-                  <c:v>1.03778</c:v>
+                  <c:v>1.01419</c:v>
                 </c:pt>
                 <c:pt idx="23">
-                  <c:v>1.05858</c:v>
+                  <c:v>1.02505</c:v>
                 </c:pt>
                 <c:pt idx="24">
-                  <c:v>1.06916</c:v>
+                  <c:v>0.99335</c:v>
                 </c:pt>
                 <c:pt idx="25">
-                  <c:v>1.03473</c:v>
+                  <c:v>0.99323</c:v>
                 </c:pt>
                 <c:pt idx="26">
-                  <c:v>1.03459</c:v>
+                  <c:v>1.0174</c:v>
                 </c:pt>
                 <c:pt idx="27">
-                  <c:v>1.05979</c:v>
+                  <c:v>0.98907</c:v>
                 </c:pt>
                 <c:pt idx="28">
-                  <c:v>1.03472</c:v>
+                  <c:v>0.99182</c:v>
                 </c:pt>
                 <c:pt idx="29">
-                  <c:v>1.03714</c:v>
+                  <c:v>0.99013</c:v>
                 </c:pt>
                 <c:pt idx="30">
-                  <c:v>1.03542</c:v>
+                  <c:v>1.00125</c:v>
                 </c:pt>
                 <c:pt idx="31">
-                  <c:v>1.04758</c:v>
+                  <c:v>1.00722</c:v>
                 </c:pt>
                 <c:pt idx="32">
-                  <c:v>1.05387</c:v>
+                  <c:v>1.01239</c:v>
                 </c:pt>
                 <c:pt idx="33">
-                  <c:v>1.05963</c:v>
+                  <c:v>1.01649</c:v>
                 </c:pt>
                 <c:pt idx="34">
-                  <c:v>1.06451</c:v>
+                  <c:v>1.00629</c:v>
                 </c:pt>
                 <c:pt idx="35">
-                  <c:v>1.05291</c:v>
+                  <c:v>1.01116</c:v>
                 </c:pt>
                 <c:pt idx="36">
-                  <c:v>1.05828</c:v>
+                  <c:v>1.00363</c:v>
                 </c:pt>
                 <c:pt idx="37">
-                  <c:v>1.05011</c:v>
+                  <c:v>0.99807</c:v>
                 </c:pt>
                 <c:pt idx="38">
-                  <c:v>1.04417</c:v>
+                  <c:v>1.00792</c:v>
                 </c:pt>
                 <c:pt idx="39">
-                  <c:v>1.05462</c:v>
+                  <c:v>0.99681</c:v>
                 </c:pt>
                 <c:pt idx="40">
-                  <c:v>1.04278</c:v>
+                  <c:v>0.97899</c:v>
                 </c:pt>
                 <c:pt idx="41">
-                  <c:v>1.02401</c:v>
+                  <c:v>0.97281</c:v>
                 </c:pt>
                 <c:pt idx="42">
-                  <c:v>1.02255</c:v>
+                  <c:v>0.97309</c:v>
                 </c:pt>
                 <c:pt idx="43">
-                  <c:v>1.02261</c:v>
+                  <c:v>0.97259</c:v>
                 </c:pt>
                 <c:pt idx="44">
-                  <c:v>1.02251</c:v>
+                  <c:v>0.97267</c:v>
                 </c:pt>
                 <c:pt idx="45">
-                  <c:v>1.02253</c:v>
+                  <c:v>0.97267</c:v>
                 </c:pt>
                 <c:pt idx="46">
-                  <c:v>1.02253</c:v>
+                  <c:v>0.97268</c:v>
                 </c:pt>
                 <c:pt idx="47">
-                  <c:v>1.02253</c:v>
+                  <c:v>0.97268</c:v>
                 </c:pt>
                 <c:pt idx="48">
-                  <c:v>1.02665</c:v>
+                  <c:v>0.97848</c:v>
                 </c:pt>
                 <c:pt idx="49">
-                  <c:v>1.03722</c:v>
+                  <c:v>0.97843</c:v>
                 </c:pt>
               </c:numCache>
             </c:numRef>
@@ -3460,154 +3462,154 @@
                 <c:formatCode>General</c:formatCode>
                 <c:ptCount val="50"/>
                 <c:pt idx="0">
-                  <c:v>0.95383</c:v>
+                  <c:v>1.10069</c:v>
                 </c:pt>
                 <c:pt idx="1">
-                  <c:v>1.04987</c:v>
+                  <c:v>0.92914</c:v>
                 </c:pt>
                 <c:pt idx="2">
-                  <c:v>0.88624</c:v>
+                  <c:v>0.83423</c:v>
                 </c:pt>
                 <c:pt idx="3">
-                  <c:v>0.79572</c:v>
+                  <c:v>0.83476</c:v>
                 </c:pt>
                 <c:pt idx="4">
-                  <c:v>0.79622</c:v>
+                  <c:v>0.76568</c:v>
                 </c:pt>
                 <c:pt idx="5">
-                  <c:v>0.73033</c:v>
+                  <c:v>0.77349</c:v>
                 </c:pt>
                 <c:pt idx="6">
-                  <c:v>0.73778</c:v>
+                  <c:v>0.73482</c:v>
                 </c:pt>
                 <c:pt idx="7">
-                  <c:v>0.7009</c:v>
+                  <c:v>0.70008</c:v>
                 </c:pt>
                 <c:pt idx="8">
-                  <c:v>0.66776</c:v>
+                  <c:v>0.67983</c:v>
                 </c:pt>
                 <c:pt idx="9">
-                  <c:v>0.64845</c:v>
+                  <c:v>0.65596</c:v>
                 </c:pt>
                 <c:pt idx="10">
-                  <c:v>0.62568</c:v>
+                  <c:v>0.70814</c:v>
                 </c:pt>
                 <c:pt idx="11">
-                  <c:v>0.67545</c:v>
+                  <c:v>0.73543</c:v>
                 </c:pt>
                 <c:pt idx="12">
-                  <c:v>0.70148</c:v>
+                  <c:v>0.75513</c:v>
                 </c:pt>
                 <c:pt idx="13">
-                  <c:v>0.72027</c:v>
+                  <c:v>0.72501</c:v>
                 </c:pt>
                 <c:pt idx="14">
-                  <c:v>0.69154</c:v>
+                  <c:v>0.76162</c:v>
                 </c:pt>
                 <c:pt idx="15">
-                  <c:v>0.72646</c:v>
+                  <c:v>0.77736</c:v>
                 </c:pt>
                 <c:pt idx="16">
-                  <c:v>0.74147</c:v>
+                  <c:v>0.76037</c:v>
                 </c:pt>
                 <c:pt idx="17">
-                  <c:v>0.72526</c:v>
+                  <c:v>0.74367</c:v>
                 </c:pt>
                 <c:pt idx="18">
-                  <c:v>0.70934</c:v>
+                  <c:v>0.6745</c:v>
                 </c:pt>
                 <c:pt idx="19">
-                  <c:v>0.64336</c:v>
+                  <c:v>0.66902</c:v>
                 </c:pt>
                 <c:pt idx="20">
-                  <c:v>0.63813</c:v>
+                  <c:v>0.71807</c:v>
                 </c:pt>
                 <c:pt idx="21">
-                  <c:v>0.68491</c:v>
+                  <c:v>0.69799</c:v>
                 </c:pt>
                 <c:pt idx="22">
-                  <c:v>0.66576</c:v>
+                  <c:v>0.64088</c:v>
                 </c:pt>
                 <c:pt idx="23">
-                  <c:v>0.61129</c:v>
+                  <c:v>0.61287</c:v>
                 </c:pt>
                 <c:pt idx="24">
-                  <c:v>0.58457</c:v>
+                  <c:v>0.6956</c:v>
                 </c:pt>
                 <c:pt idx="25">
-                  <c:v>0.66349</c:v>
+                  <c:v>0.6959</c:v>
                 </c:pt>
                 <c:pt idx="26">
-                  <c:v>0.66378</c:v>
+                  <c:v>0.60217</c:v>
                 </c:pt>
                 <c:pt idx="27">
-                  <c:v>0.57437</c:v>
+                  <c:v>0.6949</c:v>
                 </c:pt>
                 <c:pt idx="28">
-                  <c:v>0.66282</c:v>
+                  <c:v>0.68217</c:v>
                 </c:pt>
                 <c:pt idx="29">
-                  <c:v>0.65067</c:v>
+                  <c:v>0.69108</c:v>
                 </c:pt>
                 <c:pt idx="30">
-                  <c:v>0.65918</c:v>
+                  <c:v>0.62973</c:v>
                 </c:pt>
                 <c:pt idx="31">
-                  <c:v>0.60065</c:v>
+                  <c:v>0.60135</c:v>
                 </c:pt>
                 <c:pt idx="32">
-                  <c:v>0.57358</c:v>
+                  <c:v>0.57817</c:v>
                 </c:pt>
                 <c:pt idx="33">
-                  <c:v>0.55147</c:v>
+                  <c:v>0.56166</c:v>
                 </c:pt>
                 <c:pt idx="34">
-                  <c:v>0.53573</c:v>
+                  <c:v>0.59641</c:v>
                 </c:pt>
                 <c:pt idx="35">
-                  <c:v>0.56887</c:v>
+                  <c:v>0.57997</c:v>
                 </c:pt>
                 <c:pt idx="36">
-                  <c:v>0.55319</c:v>
+                  <c:v>0.60323</c:v>
                 </c:pt>
                 <c:pt idx="37">
-                  <c:v>0.57538</c:v>
+                  <c:v>0.62062</c:v>
                 </c:pt>
                 <c:pt idx="38">
-                  <c:v>0.59197</c:v>
+                  <c:v>0.58935</c:v>
                 </c:pt>
                 <c:pt idx="39">
-                  <c:v>0.56214</c:v>
+                  <c:v>0.62208</c:v>
                 </c:pt>
                 <c:pt idx="40">
-                  <c:v>0.59336</c:v>
+                  <c:v>0.67713</c:v>
                 </c:pt>
                 <c:pt idx="41">
-                  <c:v>0.64586</c:v>
+                  <c:v>0.69814</c:v>
                 </c:pt>
                 <c:pt idx="42">
-                  <c:v>0.66591</c:v>
+                  <c:v>0.69037</c:v>
                 </c:pt>
                 <c:pt idx="43">
-                  <c:v>0.6585</c:v>
+                  <c:v>0.73088</c:v>
                 </c:pt>
                 <c:pt idx="44">
-                  <c:v>0.69714</c:v>
+                  <c:v>0.69046</c:v>
                 </c:pt>
                 <c:pt idx="45">
-                  <c:v>0.65859</c:v>
+                  <c:v>0.68977</c:v>
                 </c:pt>
                 <c:pt idx="46">
-                  <c:v>0.65793</c:v>
+                  <c:v>0.61937</c:v>
                 </c:pt>
                 <c:pt idx="47">
-                  <c:v>0.59077</c:v>
+                  <c:v>0.58398</c:v>
                 </c:pt>
                 <c:pt idx="48">
-                  <c:v>0.55702</c:v>
+                  <c:v>0.53486</c:v>
                 </c:pt>
                 <c:pt idx="49">
-                  <c:v>0.51017</c:v>
+                  <c:v>0.53486</c:v>
                 </c:pt>
               </c:numCache>
             </c:numRef>
@@ -12831,7 +12833,7 @@
             <a:r>
               <a:rPr lang="en-US" dirty="0"/>
               <a:t>SPEAKER 1 (about 15 seconds)
-Hi, we're Team Renaissance. We were given one stock, KESTREL_EM, and three rounds. When the market crashed, simply holding the stock lost 49%. Our Round 3 strategy finished up 3.7%. Here's how we did it.</a:t>
+Hi, we're Team Renaissance. We were given one stock, KESTREL_EM, and three rounds. When the market crashed, simply holding the stock lost 47%. Our causal Round 3 engine, which only uses past data, lost just 2.2%. Here's how we built it.</a:t>
             </a:r>
             <a:endParaRPr lang="en-US" dirty="0"/>
           </a:p>
@@ -13188,7 +13190,7 @@
 On the crash days the organisers hid the close but still gave high, low and order_flow. One equation, one unknown, so we can solve for the close exactly. Row 1 checks out: (2 x 238.56 - 239.57 - 232.41) / 7.16 = 0.7179, the order_flow in the file.
 We checked it on all 850 rows where the close is known (max error 0.0005, just rounding), and its 10-day average matches the sma_10 column the organisers still gave on the crash days.
 We needed the close to measure returns, swings and drawdown for the crash alarm.
-In Round 3 we only use yesterday's rebuilt close to set today's position, which is fair. Round 2 used tomorrow's close to label today, which is look-ahead, and that's why we rebuilt Round 3.</a:t>
+Our causal engine only uses yesterday's rebuilt close to set today's position, which is fair. Our final Round 3 upload used tomorrow's rebuilt close to set today's position, which is look-ahead.</a:t>
             </a:r>
             <a:endParaRPr lang="en-US" dirty="0"/>
           </a:p>
@@ -13276,7 +13278,10 @@
           <a:p>
             <a:r>
               <a:rPr lang="en-US" dirty="0"/>
-              <a:t>Backup for questions on the Round 3 signal code. Step 7 is the proof: for each of the 50 test bars we delete every later row, rebuild the signal and require an exact match.</a:t>
+              <a:t>HOW TO EXPLAIN IT
+Round 1 was our three-model blend, using only past data.
+Round 2 was a model retrained on past data with a crash adjustment. It scores 59.3% balanced accuracy against the rebuilt closes, but the two adjustment numbers may have been set while checking crash-day accuracy, so treat that as in-sample.
+Round 3: our final upload, generate_round3_100.py, set each position from the next day's rebuilt close. It matches the next day's direction on every bar, which is look-ahead. Our causal engine, generate_round3_signals.py, is what we presented: it only uses past data and passes the no-future-data check.</a:t>
             </a:r>
             <a:endParaRPr lang="en-US" dirty="0"/>
           </a:p>
@@ -13364,7 +13369,7 @@
           <a:p>
             <a:r>
               <a:rPr lang="en-US" dirty="0"/>
-              <a:t>Adaptive Regression Breakout Map, a Pine Script v6 indicator we ported line by line to Python inside REGIME-X. The Round 1 to 3 submission scripts do not call ARBM.</a:t>
+              <a:t>Backup for questions on the Round 3 signal code. Step 7 is the proof: for each of the 50 test bars we delete every later row, rebuild the signal and require an exact match.</a:t>
             </a:r>
             <a:endParaRPr lang="en-US" dirty="0"/>
           </a:p>
@@ -13452,7 +13457,7 @@
           <a:p>
             <a:r>
               <a:rPr lang="en-US" dirty="0"/>
-              <a:t>Any Yahoo Finance or NSE ticker, or a CSV, through the full stack: ARBM, four-regime detection on trailing windows, three calibrated classifiers chosen by validation MCC, a hybrid position blend capped by regime, and a cost-aware backtest. FastAPI backend, Next.js dashboard.</a:t>
+              <a:t>Adaptive Regression Breakout Map, a Pine Script v6 indicator we ported line by line to Python inside REGIME-X. The Round 1 to 3 submission scripts do not call ARBM.</a:t>
             </a:r>
             <a:endParaRPr lang="en-US" dirty="0"/>
           </a:p>
@@ -13476,6 +13481,94 @@
             <a:fld id="{F7021451-1387-4CA6-816F-3879F97B5CBC}" type="slidenum">
               <a:rPr lang="en-US"/>
               <a:t>16</a:t>
+            </a:fld>
+            <a:endParaRPr lang="en-US"/>
+          </a:p>
+        </p:txBody>
+      </p:sp>
+    </p:spTree>
+    <p:extLst>
+      <p:ext uri="{BB962C8B-B14F-4D97-AF65-F5344CB8AC3E}">
+        <p14:creationId xmlns:p14="http://schemas.microsoft.com/office/powerpoint/2010/main" val="1024086991"/>
+      </p:ext>
+    </p:extLst>
+  </p:cSld>
+  <p:clrMapOvr>
+    <a:masterClrMapping/>
+  </p:clrMapOvr>
+</p:notes>
+</file>
+
+<file path=ppt/notesSlides/notesSlide17.xml><?xml version="1.0" encoding="utf-8"?>
+<p:notes xmlns:a="http://schemas.openxmlformats.org/drawingml/2006/main" xmlns:r="http://schemas.openxmlformats.org/officeDocument/2006/relationships" xmlns:p="http://schemas.openxmlformats.org/presentationml/2006/main">
+  <p:cSld>
+    <p:spTree>
+      <p:nvGrpSpPr>
+        <p:cNvPr id="1" name=""/>
+        <p:cNvGrpSpPr/>
+        <p:nvPr/>
+      </p:nvGrpSpPr>
+      <p:grpSpPr>
+        <a:xfrm>
+          <a:off x="0" y="0"/>
+          <a:ext cx="0" cy="0"/>
+          <a:chOff x="0" y="0"/>
+          <a:chExt cx="0" cy="0"/>
+        </a:xfrm>
+      </p:grpSpPr>
+      <p:sp>
+        <p:nvSpPr>
+          <p:cNvPr id="2" name="Slide Image Placeholder 1"/>
+          <p:cNvSpPr>
+            <a:spLocks noGrp="1" noRot="1" noChangeAspect="1"/>
+          </p:cNvSpPr>
+          <p:nvPr>
+            <p:ph type="sldImg"/>
+          </p:nvPr>
+        </p:nvSpPr>
+        <p:spPr/>
+      </p:sp>
+      <p:sp>
+        <p:nvSpPr>
+          <p:cNvPr id="3" name="Notes Placeholder 2"/>
+          <p:cNvSpPr>
+            <a:spLocks noGrp="1"/>
+          </p:cNvSpPr>
+          <p:nvPr>
+            <p:ph type="body" idx="1"/>
+          </p:nvPr>
+        </p:nvSpPr>
+        <p:spPr/>
+        <p:txBody>
+          <a:bodyPr/>
+          <a:lstStyle/>
+          <a:p>
+            <a:r>
+              <a:rPr lang="en-US" dirty="0"/>
+              <a:t>Any Yahoo Finance or NSE ticker, or a CSV, through the full stack: ARBM, four-regime detection on trailing windows, three calibrated classifiers chosen by validation MCC, a hybrid position blend capped by regime, and a cost-aware backtest. FastAPI backend, Next.js dashboard.</a:t>
+            </a:r>
+            <a:endParaRPr lang="en-US" dirty="0"/>
+          </a:p>
+        </p:txBody>
+      </p:sp>
+      <p:sp>
+        <p:nvSpPr>
+          <p:cNvPr id="4" name="Slide Number Placeholder 3"/>
+          <p:cNvSpPr>
+            <a:spLocks noGrp="1"/>
+          </p:cNvSpPr>
+          <p:nvPr>
+            <p:ph type="sldNum" sz="quarter" idx="10"/>
+          </p:nvPr>
+        </p:nvSpPr>
+        <p:spPr/>
+        <p:txBody>
+          <a:bodyPr/>
+          <a:lstStyle/>
+          <a:p>
+            <a:fld id="{F7021451-1387-4CA6-816F-3879F97B5CBC}" type="slidenum">
+              <a:rPr lang="en-US"/>
+              <a:t>17</a:t>
             </a:fld>
             <a:endParaRPr lang="en-US"/>
           </a:p>
@@ -13815,7 +13908,8 @@
               <a:rPr lang="en-US" dirty="0"/>
               <a:t>SPEAKER 3 (about 30 seconds)
 Then the market crashed. Daily swings went from about 1% to about 7%, five times bigger. A model trained on the calm market stops working.
-So we added a crash alarm. It goes off if any of three things happens: swings get much bigger than normal, the price drops more than 12% from its recent high, or there is one huge move in a single day. Once it goes off, we stay careful for 15 days.</a:t>
+So we added a crash alarm. It goes off if any of three things happens: swings get much bigger than normal, the price drops more than 12% from its recent high, or there is one huge move in a single day. Once it goes off, we stay careful for 15 days.
+For Round 2 itself we retrained a model on past data only and added a crash adjustment; that's in the backup slides.</a:t>
             </a:r>
             <a:endParaRPr lang="en-US" dirty="0"/>
           </a:p>
@@ -13904,7 +13998,7 @@
             <a:r>
               <a:rPr lang="en-US" dirty="0"/>
               <a:t>SPEAKER 3 (about 30 seconds)
-In Round 3 we choose a position every day, from minus one to plus one.
+In Round 3 we choose a position every day, from minus one to plus one. This is our causal engine: it only ever uses past data.
 When the market is calm, we follow the trend and buy.
 When the crash alarm is on, we take only a small short bet while the price is falling, or we stay out completely.
 We also change positions slowly when adding risk but quickly when cutting it. That keeps trading costs low.
@@ -13998,9 +14092,9 @@
               <a:rPr lang="en-US" dirty="0"/>
               <a:t>SPEAKER 3 (about 30 seconds)
 This is what 1 unit of money became over the 50 crash days, after trading costs.
-The grey line is just holding the stock: it lost 49%, and at its worst it was down 51%.
-The green line is us: up 3.7%, and never more than 4.4% down.
-We also traded very little, which keeps costs low. This is our own calculation, not the official score.</a:t>
+The grey line is just holding the stock: it lost 47%, and at its worst it was down 51%.
+The green line is our causal engine: down only 2.2%, and never more than 6.6% down.
+It doesn't make money in the crash, but it keeps almost all the capital, and it traded very little. This is our own calculation, scored against the next day's move like the target, not the official score.</a:t>
             </a:r>
             <a:endParaRPr lang="en-US" dirty="0"/>
           </a:p>
@@ -14091,10 +14185,9 @@
               <a:t>SPEAKER 4 (about 40 seconds)
 Everything is in our GitHub repo.
 Round 1 script: builds the inputs, trains three models and mixes them. A second script tests it fairly.
-Round 2 script: we found the hidden close price could be worked out from the order flow column.
-Round 3 script: the crash alarm, the position sizing, and a check that proves we never used future data.
+Round 2 script: a model retrained on past data only, with a crash adjustment.
+Round 3: our final upload used the next day's price, which is look-ahead. Our causal engine, generate_round3_signals.py, has the crash alarm, the position sizing, and a check that proves it never uses future data.
 REGIME-X: our research app, with a dashboard, used to test ideas before using our 10 uploads.
-One honest note: Round 2 used the next day's price, so we rebuilt Round 3 to use only past data.
 Thank you, happy to take questions.</a:t>
             </a:r>
             <a:endParaRPr lang="en-US" dirty="0"/>
@@ -15137,7 +15230,7 @@
                   <a:srgbClr val="C9D6D4"/>
                 </a:solidFill>
               </a:rPr>
-              <a:t>When the market crashed, holding the stock lost 49.0%. Our Round 3 strategy made +3.7%.</a:t>
+              <a:t>When the market crashed, holding the stock lost 46.5%. Our causal Round 3 engine lost only 2.2%.</a:t>
             </a:r>
             <a:endParaRPr lang="en-US" sz="1800" dirty="0"/>
           </a:p>
@@ -20155,7 +20248,7 @@
                   <a:schemeClr val="accent2"/>
                 </a:solidFill>
               </a:rPr>
-              <a:t>ROUND 2 · generate_round2_round3_submissions.py</a:t>
+              <a:t>DATA FORENSICS · used by generate_round3_signals.py</a:t>
             </a:r>
             <a:endParaRPr lang="en-US" sz="1000" dirty="0"/>
           </a:p>
@@ -20785,7 +20878,7 @@
                   <a:schemeClr val="accent5"/>
                 </a:solidFill>
               </a:rPr>
-              <a:t>FAIR · Round 3</a:t>
+              <a:t>FAIR · causal engine</a:t>
             </a:r>
             <a:endParaRPr lang="en-US" sz="1050" dirty="0"/>
           </a:p>
@@ -20884,7 +20977,7 @@
                   <a:schemeClr val="accent3"/>
                 </a:solidFill>
               </a:rPr>
-              <a:t>LOOK-AHEAD · Round 2</a:t>
+              <a:t>LOOK-AHEAD · final Round 3 upload</a:t>
             </a:r>
             <a:endParaRPr lang="en-US" sz="1050" dirty="0"/>
           </a:p>
@@ -20920,7 +21013,7 @@
                   <a:schemeClr val="tx1"/>
                 </a:solidFill>
               </a:rPr>
-              <a:t>Tomorrow's rebuilt close → today's label. Why we rebuilt Round 3</a:t>
+              <a:t>Tomorrow's rebuilt close → today's position</a:t>
             </a:r>
             <a:endParaRPr lang="en-US" sz="1100" dirty="0"/>
           </a:p>
@@ -21028,7 +21121,7 @@
                   <a:schemeClr val="tx1"/>
                 </a:solidFill>
               </a:rPr>
-              <a:t>Round 3 engine, all seven steps</a:t>
+              <a:t>What we actually uploaded</a:t>
             </a:r>
             <a:endParaRPr lang="en-US" sz="2800" dirty="0"/>
           </a:p>
@@ -21064,146 +21157,1364 @@
                   <a:schemeClr val="accent2"/>
                 </a:solidFill>
               </a:rPr>
-              <a:t>ROUND 3 · generate_round3_signals.py</a:t>
+              <a:t>SUBMISSIONS · FROM GIT HISTORY</a:t>
             </a:r>
             <a:endParaRPr lang="en-US" sz="1000" dirty="0"/>
           </a:p>
         </p:txBody>
       </p:sp>
-      <p:sp>
-        <p:nvSpPr>
-          <p:cNvPr id="5" name="card-179"/>
-          <p:cNvSpPr/>
-          <p:nvPr/>
-        </p:nvSpPr>
-        <p:spPr>
-          <a:xfrm>
-            <a:off x="457200" y="1143000"/>
-            <a:ext cx="1885950" cy="1463040"/>
-          </a:xfrm>
-          <a:prstGeom prst="roundRect">
-            <a:avLst>
-              <a:gd name="adj" fmla="val 5000"/>
-            </a:avLst>
-          </a:prstGeom>
-          <a:solidFill>
-            <a:schemeClr val="bg2"/>
-          </a:solidFill>
-          <a:ln w="12700">
-            <a:solidFill>
-              <a:schemeClr val="bg2"/>
-            </a:solidFill>
-            <a:prstDash val="solid"/>
-          </a:ln>
-        </p:spPr>
-      </p:sp>
-      <p:sp>
-        <p:nvSpPr>
-          <p:cNvPr id="6" name="step-dot-180"/>
-          <p:cNvSpPr/>
-          <p:nvPr/>
-        </p:nvSpPr>
-        <p:spPr>
-          <a:xfrm>
-            <a:off x="594360" y="1280160"/>
-            <a:ext cx="329184" cy="329184"/>
-          </a:xfrm>
-          <a:prstGeom prst="ellipse">
-            <a:avLst/>
-          </a:prstGeom>
-          <a:solidFill>
-            <a:schemeClr val="accent1"/>
-          </a:solidFill>
-          <a:ln w="12700">
-            <a:solidFill>
-              <a:schemeClr val="accent1"/>
-            </a:solidFill>
-            <a:prstDash val="solid"/>
-          </a:ln>
-        </p:spPr>
-      </p:sp>
-      <p:sp>
-        <p:nvSpPr>
-          <p:cNvPr id="7" name="text-181"/>
+      <p:graphicFrame>
+        <p:nvGraphicFramePr>
+          <p:cNvPr id="15" name="table-uploads"/>
+          <p:cNvGraphicFramePr>
+            <a:graphicFrameLocks noGrp="1"/>
+          </p:cNvGraphicFramePr>
+          <p:nvPr>
+            <p:extLst>
+              <p:ext uri="{D42A27DB-BD31-4B8C-83A1-F6EECF244321}">
+                <p14:modId xmlns:p14="http://schemas.microsoft.com/office/powerpoint/2010/main" val="1579011935"/>
+              </p:ext>
+            </p:extLst>
+          </p:nvPr>
+        </p:nvGraphicFramePr>
+        <p:xfrm>
+          <a:off x="457200" y="1097280"/>
+          <a:ext cx="8229600" cy="914400"/>
+        </p:xfrm>
+        <a:graphic>
+          <a:graphicData uri="http://schemas.openxmlformats.org/drawingml/2006/table">
+            <a:tbl>
+              <a:tblPr/>
+              <a:tblGrid>
+                <a:gridCol w="1188720"/>
+                <a:gridCol w="2971800"/>
+                <a:gridCol w="2377440"/>
+                <a:gridCol w="1691640"/>
+              </a:tblGrid>
+              <a:tr h="566928">
+                <a:tc>
+                  <a:txBody>
+                    <a:bodyPr/>
+                    <a:lstStyle/>
+                    <a:p>
+                      <a:pPr algn="l" indent="0" marL="0">
+                        <a:buNone/>
+                      </a:pPr>
+                      <a:r>
+                        <a:rPr lang="en-US" sz="1200" b="1" dirty="0">
+                          <a:solidFill>
+                            <a:srgbClr val="55666E"/>
+                          </a:solidFill>
+                          <a:latin typeface="Calibri" pitchFamily="34" charset="0"/>
+                          <a:ea typeface="Calibri" pitchFamily="34" charset="-122"/>
+                          <a:cs typeface="Calibri" pitchFamily="34" charset="-120"/>
+                        </a:rPr>
+                        <a:t>Round</a:t>
+                      </a:r>
+                      <a:endParaRPr lang="en-US" sz="1200" dirty="0">
+                        <a:latin typeface="Calibri" charset="0"/>
+                        <a:ea typeface="Calibri" charset="0"/>
+                        <a:cs typeface="Calibri" charset="0"/>
+                      </a:endParaRPr>
+                    </a:p>
+                  </a:txBody>
+                  <a:tcPr marL="45720" marR="45720" marT="45720" marB="45720">
+                    <a:lnL w="9525" cap="flat" cmpd="sng" algn="ctr">
+                      <a:solidFill>
+                        <a:srgbClr val="D5DDDE"/>
+                      </a:solidFill>
+                      <a:prstDash val="solid"/>
+                      <a:round/>
+                      <a:headEnd type="none" w="med" len="med"/>
+                      <a:tailEnd type="none" w="med" len="med"/>
+                    </a:lnL>
+                    <a:lnR w="9525" cap="flat" cmpd="sng" algn="ctr">
+                      <a:solidFill>
+                        <a:srgbClr val="D5DDDE"/>
+                      </a:solidFill>
+                      <a:prstDash val="solid"/>
+                      <a:round/>
+                      <a:headEnd type="none" w="med" len="med"/>
+                      <a:tailEnd type="none" w="med" len="med"/>
+                    </a:lnR>
+                    <a:lnT w="9525" cap="flat" cmpd="sng" algn="ctr">
+                      <a:solidFill>
+                        <a:srgbClr val="D5DDDE"/>
+                      </a:solidFill>
+                      <a:prstDash val="solid"/>
+                      <a:round/>
+                      <a:headEnd type="none" w="med" len="med"/>
+                      <a:tailEnd type="none" w="med" len="med"/>
+                    </a:lnT>
+                    <a:lnB w="9525" cap="flat" cmpd="sng" algn="ctr">
+                      <a:solidFill>
+                        <a:srgbClr val="D5DDDE"/>
+                      </a:solidFill>
+                      <a:prstDash val="solid"/>
+                      <a:round/>
+                      <a:headEnd type="none" w="med" len="med"/>
+                      <a:tailEnd type="none" w="med" len="med"/>
+                    </a:lnB>
+                  </a:tcPr>
+                </a:tc>
+                <a:tc>
+                  <a:txBody>
+                    <a:bodyPr/>
+                    <a:lstStyle/>
+                    <a:p>
+                      <a:pPr algn="l" indent="0" marL="0">
+                        <a:buNone/>
+                      </a:pPr>
+                      <a:r>
+                        <a:rPr lang="en-US" sz="1200" b="1" dirty="0">
+                          <a:solidFill>
+                            <a:srgbClr val="55666E"/>
+                          </a:solidFill>
+                          <a:latin typeface="Calibri" pitchFamily="34" charset="0"/>
+                          <a:ea typeface="Calibri" pitchFamily="34" charset="-122"/>
+                          <a:cs typeface="Calibri" pitchFamily="34" charset="-120"/>
+                        </a:rPr>
+                        <a:t>Script</a:t>
+                      </a:r>
+                      <a:endParaRPr lang="en-US" sz="1200" dirty="0">
+                        <a:latin typeface="Calibri" charset="0"/>
+                        <a:ea typeface="Calibri" charset="0"/>
+                        <a:cs typeface="Calibri" charset="0"/>
+                      </a:endParaRPr>
+                    </a:p>
+                  </a:txBody>
+                  <a:tcPr marL="45720" marR="45720" marT="45720" marB="45720">
+                    <a:lnL w="9525" cap="flat" cmpd="sng" algn="ctr">
+                      <a:solidFill>
+                        <a:srgbClr val="D5DDDE"/>
+                      </a:solidFill>
+                      <a:prstDash val="solid"/>
+                      <a:round/>
+                      <a:headEnd type="none" w="med" len="med"/>
+                      <a:tailEnd type="none" w="med" len="med"/>
+                    </a:lnL>
+                    <a:lnR w="9525" cap="flat" cmpd="sng" algn="ctr">
+                      <a:solidFill>
+                        <a:srgbClr val="D5DDDE"/>
+                      </a:solidFill>
+                      <a:prstDash val="solid"/>
+                      <a:round/>
+                      <a:headEnd type="none" w="med" len="med"/>
+                      <a:tailEnd type="none" w="med" len="med"/>
+                    </a:lnR>
+                    <a:lnT w="9525" cap="flat" cmpd="sng" algn="ctr">
+                      <a:solidFill>
+                        <a:srgbClr val="D5DDDE"/>
+                      </a:solidFill>
+                      <a:prstDash val="solid"/>
+                      <a:round/>
+                      <a:headEnd type="none" w="med" len="med"/>
+                      <a:tailEnd type="none" w="med" len="med"/>
+                    </a:lnT>
+                    <a:lnB w="9525" cap="flat" cmpd="sng" algn="ctr">
+                      <a:solidFill>
+                        <a:srgbClr val="D5DDDE"/>
+                      </a:solidFill>
+                      <a:prstDash val="solid"/>
+                      <a:round/>
+                      <a:headEnd type="none" w="med" len="med"/>
+                      <a:tailEnd type="none" w="med" len="med"/>
+                    </a:lnB>
+                  </a:tcPr>
+                </a:tc>
+                <a:tc>
+                  <a:txBody>
+                    <a:bodyPr/>
+                    <a:lstStyle/>
+                    <a:p>
+                      <a:pPr algn="l" indent="0" marL="0">
+                        <a:buNone/>
+                      </a:pPr>
+                      <a:r>
+                        <a:rPr lang="en-US" sz="1200" b="1" dirty="0">
+                          <a:solidFill>
+                            <a:srgbClr val="55666E"/>
+                          </a:solidFill>
+                          <a:latin typeface="Calibri" pitchFamily="34" charset="0"/>
+                          <a:ea typeface="Calibri" pitchFamily="34" charset="-122"/>
+                          <a:cs typeface="Calibri" pitchFamily="34" charset="-120"/>
+                        </a:rPr>
+                        <a:t>How it works</a:t>
+                      </a:r>
+                      <a:endParaRPr lang="en-US" sz="1200" dirty="0">
+                        <a:latin typeface="Calibri" charset="0"/>
+                        <a:ea typeface="Calibri" charset="0"/>
+                        <a:cs typeface="Calibri" charset="0"/>
+                      </a:endParaRPr>
+                    </a:p>
+                  </a:txBody>
+                  <a:tcPr marL="45720" marR="45720" marT="45720" marB="45720">
+                    <a:lnL w="9525" cap="flat" cmpd="sng" algn="ctr">
+                      <a:solidFill>
+                        <a:srgbClr val="D5DDDE"/>
+                      </a:solidFill>
+                      <a:prstDash val="solid"/>
+                      <a:round/>
+                      <a:headEnd type="none" w="med" len="med"/>
+                      <a:tailEnd type="none" w="med" len="med"/>
+                    </a:lnL>
+                    <a:lnR w="9525" cap="flat" cmpd="sng" algn="ctr">
+                      <a:solidFill>
+                        <a:srgbClr val="D5DDDE"/>
+                      </a:solidFill>
+                      <a:prstDash val="solid"/>
+                      <a:round/>
+                      <a:headEnd type="none" w="med" len="med"/>
+                      <a:tailEnd type="none" w="med" len="med"/>
+                    </a:lnR>
+                    <a:lnT w="9525" cap="flat" cmpd="sng" algn="ctr">
+                      <a:solidFill>
+                        <a:srgbClr val="D5DDDE"/>
+                      </a:solidFill>
+                      <a:prstDash val="solid"/>
+                      <a:round/>
+                      <a:headEnd type="none" w="med" len="med"/>
+                      <a:tailEnd type="none" w="med" len="med"/>
+                    </a:lnT>
+                    <a:lnB w="9525" cap="flat" cmpd="sng" algn="ctr">
+                      <a:solidFill>
+                        <a:srgbClr val="D5DDDE"/>
+                      </a:solidFill>
+                      <a:prstDash val="solid"/>
+                      <a:round/>
+                      <a:headEnd type="none" w="med" len="med"/>
+                      <a:tailEnd type="none" w="med" len="med"/>
+                    </a:lnB>
+                  </a:tcPr>
+                </a:tc>
+                <a:tc>
+                  <a:txBody>
+                    <a:bodyPr/>
+                    <a:lstStyle/>
+                    <a:p>
+                      <a:pPr algn="l" indent="0" marL="0">
+                        <a:buNone/>
+                      </a:pPr>
+                      <a:r>
+                        <a:rPr lang="en-US" sz="1200" b="1" dirty="0">
+                          <a:solidFill>
+                            <a:srgbClr val="55666E"/>
+                          </a:solidFill>
+                          <a:latin typeface="Calibri" pitchFamily="34" charset="0"/>
+                          <a:ea typeface="Calibri" pitchFamily="34" charset="-122"/>
+                          <a:cs typeface="Calibri" pitchFamily="34" charset="-120"/>
+                        </a:rPr>
+                        <a:t>Uses future data?</a:t>
+                      </a:r>
+                      <a:endParaRPr lang="en-US" sz="1200" dirty="0">
+                        <a:latin typeface="Calibri" charset="0"/>
+                        <a:ea typeface="Calibri" charset="0"/>
+                        <a:cs typeface="Calibri" charset="0"/>
+                      </a:endParaRPr>
+                    </a:p>
+                  </a:txBody>
+                  <a:tcPr marL="45720" marR="45720" marT="45720" marB="45720">
+                    <a:lnL w="9525" cap="flat" cmpd="sng" algn="ctr">
+                      <a:solidFill>
+                        <a:srgbClr val="D5DDDE"/>
+                      </a:solidFill>
+                      <a:prstDash val="solid"/>
+                      <a:round/>
+                      <a:headEnd type="none" w="med" len="med"/>
+                      <a:tailEnd type="none" w="med" len="med"/>
+                    </a:lnL>
+                    <a:lnR w="9525" cap="flat" cmpd="sng" algn="ctr">
+                      <a:solidFill>
+                        <a:srgbClr val="D5DDDE"/>
+                      </a:solidFill>
+                      <a:prstDash val="solid"/>
+                      <a:round/>
+                      <a:headEnd type="none" w="med" len="med"/>
+                      <a:tailEnd type="none" w="med" len="med"/>
+                    </a:lnR>
+                    <a:lnT w="9525" cap="flat" cmpd="sng" algn="ctr">
+                      <a:solidFill>
+                        <a:srgbClr val="D5DDDE"/>
+                      </a:solidFill>
+                      <a:prstDash val="solid"/>
+                      <a:round/>
+                      <a:headEnd type="none" w="med" len="med"/>
+                      <a:tailEnd type="none" w="med" len="med"/>
+                    </a:lnT>
+                    <a:lnB w="9525" cap="flat" cmpd="sng" algn="ctr">
+                      <a:solidFill>
+                        <a:srgbClr val="D5DDDE"/>
+                      </a:solidFill>
+                      <a:prstDash val="solid"/>
+                      <a:round/>
+                      <a:headEnd type="none" w="med" len="med"/>
+                      <a:tailEnd type="none" w="med" len="med"/>
+                    </a:lnB>
+                  </a:tcPr>
+                </a:tc>
+              </a:tr>
+              <a:tr h="566928">
+                <a:tc>
+                  <a:txBody>
+                    <a:bodyPr/>
+                    <a:lstStyle/>
+                    <a:p>
+                      <a:pPr indent="0" marL="0">
+                        <a:buNone/>
+                      </a:pPr>
+                      <a:r>
+                        <a:rPr lang="en-US" sz="1150" b="1" dirty="0">
+                          <a:solidFill>
+                            <a:srgbClr val="13232B"/>
+                          </a:solidFill>
+                          <a:latin typeface="Calibri" pitchFamily="34" charset="0"/>
+                          <a:ea typeface="Calibri" pitchFamily="34" charset="-122"/>
+                          <a:cs typeface="Calibri" pitchFamily="34" charset="-120"/>
+                        </a:rPr>
+                        <a:t>Round 1</a:t>
+                      </a:r>
+                      <a:endParaRPr lang="en-US" sz="1150" dirty="0">
+                        <a:latin typeface="Calibri" charset="0"/>
+                        <a:ea typeface="Calibri" charset="0"/>
+                        <a:cs typeface="Calibri" charset="0"/>
+                      </a:endParaRPr>
+                    </a:p>
+                  </a:txBody>
+                  <a:tcPr marL="45720" marR="45720" marT="45720" marB="45720">
+                    <a:lnL w="9525" cap="flat" cmpd="sng" algn="ctr">
+                      <a:solidFill>
+                        <a:srgbClr val="D5DDDE"/>
+                      </a:solidFill>
+                      <a:prstDash val="solid"/>
+                      <a:round/>
+                      <a:headEnd type="none" w="med" len="med"/>
+                      <a:tailEnd type="none" w="med" len="med"/>
+                    </a:lnL>
+                    <a:lnR w="9525" cap="flat" cmpd="sng" algn="ctr">
+                      <a:solidFill>
+                        <a:srgbClr val="D5DDDE"/>
+                      </a:solidFill>
+                      <a:prstDash val="solid"/>
+                      <a:round/>
+                      <a:headEnd type="none" w="med" len="med"/>
+                      <a:tailEnd type="none" w="med" len="med"/>
+                    </a:lnR>
+                    <a:lnT w="9525" cap="flat" cmpd="sng" algn="ctr">
+                      <a:solidFill>
+                        <a:srgbClr val="D5DDDE"/>
+                      </a:solidFill>
+                      <a:prstDash val="solid"/>
+                      <a:round/>
+                      <a:headEnd type="none" w="med" len="med"/>
+                      <a:tailEnd type="none" w="med" len="med"/>
+                    </a:lnT>
+                    <a:lnB w="9525" cap="flat" cmpd="sng" algn="ctr">
+                      <a:solidFill>
+                        <a:srgbClr val="D5DDDE"/>
+                      </a:solidFill>
+                      <a:prstDash val="solid"/>
+                      <a:round/>
+                      <a:headEnd type="none" w="med" len="med"/>
+                      <a:tailEnd type="none" w="med" len="med"/>
+                    </a:lnB>
+                  </a:tcPr>
+                </a:tc>
+                <a:tc>
+                  <a:txBody>
+                    <a:bodyPr/>
+                    <a:lstStyle/>
+                    <a:p>
+                      <a:pPr indent="0" marL="0">
+                        <a:buNone/>
+                      </a:pPr>
+                      <a:r>
+                        <a:rPr lang="en-US" sz="950" dirty="0">
+                          <a:solidFill>
+                            <a:srgbClr val="13232B"/>
+                          </a:solidFill>
+                          <a:latin typeface="Courier New" pitchFamily="34" charset="0"/>
+                          <a:ea typeface="Courier New" pitchFamily="34" charset="-122"/>
+                          <a:cs typeface="Courier New" pitchFamily="34" charset="-120"/>
+                        </a:rPr>
+                        <a:t>generate_round1_submission.py</a:t>
+                      </a:r>
+                      <a:endParaRPr lang="en-US" sz="950" dirty="0">
+                        <a:latin typeface="Courier New" charset="0"/>
+                        <a:ea typeface="Courier New" charset="0"/>
+                        <a:cs typeface="Courier New" charset="0"/>
+                      </a:endParaRPr>
+                    </a:p>
+                  </a:txBody>
+                  <a:tcPr marL="45720" marR="45720" marT="45720" marB="45720">
+                    <a:lnL w="9525" cap="flat" cmpd="sng" algn="ctr">
+                      <a:solidFill>
+                        <a:srgbClr val="D5DDDE"/>
+                      </a:solidFill>
+                      <a:prstDash val="solid"/>
+                      <a:round/>
+                      <a:headEnd type="none" w="med" len="med"/>
+                      <a:tailEnd type="none" w="med" len="med"/>
+                    </a:lnL>
+                    <a:lnR w="9525" cap="flat" cmpd="sng" algn="ctr">
+                      <a:solidFill>
+                        <a:srgbClr val="D5DDDE"/>
+                      </a:solidFill>
+                      <a:prstDash val="solid"/>
+                      <a:round/>
+                      <a:headEnd type="none" w="med" len="med"/>
+                      <a:tailEnd type="none" w="med" len="med"/>
+                    </a:lnR>
+                    <a:lnT w="9525" cap="flat" cmpd="sng" algn="ctr">
+                      <a:solidFill>
+                        <a:srgbClr val="D5DDDE"/>
+                      </a:solidFill>
+                      <a:prstDash val="solid"/>
+                      <a:round/>
+                      <a:headEnd type="none" w="med" len="med"/>
+                      <a:tailEnd type="none" w="med" len="med"/>
+                    </a:lnT>
+                    <a:lnB w="9525" cap="flat" cmpd="sng" algn="ctr">
+                      <a:solidFill>
+                        <a:srgbClr val="D5DDDE"/>
+                      </a:solidFill>
+                      <a:prstDash val="solid"/>
+                      <a:round/>
+                      <a:headEnd type="none" w="med" len="med"/>
+                      <a:tailEnd type="none" w="med" len="med"/>
+                    </a:lnB>
+                  </a:tcPr>
+                </a:tc>
+                <a:tc>
+                  <a:txBody>
+                    <a:bodyPr/>
+                    <a:lstStyle/>
+                    <a:p>
+                      <a:pPr indent="0" marL="0">
+                        <a:buNone/>
+                      </a:pPr>
+                      <a:r>
+                        <a:rPr lang="en-US" sz="1150" dirty="0">
+                          <a:solidFill>
+                            <a:srgbClr val="13232B"/>
+                          </a:solidFill>
+                          <a:latin typeface="Calibri" pitchFamily="34" charset="0"/>
+                          <a:ea typeface="Calibri" pitchFamily="34" charset="-122"/>
+                          <a:cs typeface="Calibri" pitchFamily="34" charset="-120"/>
+                        </a:rPr>
+                        <a:t>LR + HistGB + LightGBM blend on 34 inputs</a:t>
+                      </a:r>
+                      <a:endParaRPr lang="en-US" sz="1150" dirty="0">
+                        <a:latin typeface="Calibri" charset="0"/>
+                        <a:ea typeface="Calibri" charset="0"/>
+                        <a:cs typeface="Calibri" charset="0"/>
+                      </a:endParaRPr>
+                    </a:p>
+                  </a:txBody>
+                  <a:tcPr marL="45720" marR="45720" marT="45720" marB="45720">
+                    <a:lnL w="9525" cap="flat" cmpd="sng" algn="ctr">
+                      <a:solidFill>
+                        <a:srgbClr val="D5DDDE"/>
+                      </a:solidFill>
+                      <a:prstDash val="solid"/>
+                      <a:round/>
+                      <a:headEnd type="none" w="med" len="med"/>
+                      <a:tailEnd type="none" w="med" len="med"/>
+                    </a:lnL>
+                    <a:lnR w="9525" cap="flat" cmpd="sng" algn="ctr">
+                      <a:solidFill>
+                        <a:srgbClr val="D5DDDE"/>
+                      </a:solidFill>
+                      <a:prstDash val="solid"/>
+                      <a:round/>
+                      <a:headEnd type="none" w="med" len="med"/>
+                      <a:tailEnd type="none" w="med" len="med"/>
+                    </a:lnR>
+                    <a:lnT w="9525" cap="flat" cmpd="sng" algn="ctr">
+                      <a:solidFill>
+                        <a:srgbClr val="D5DDDE"/>
+                      </a:solidFill>
+                      <a:prstDash val="solid"/>
+                      <a:round/>
+                      <a:headEnd type="none" w="med" len="med"/>
+                      <a:tailEnd type="none" w="med" len="med"/>
+                    </a:lnT>
+                    <a:lnB w="9525" cap="flat" cmpd="sng" algn="ctr">
+                      <a:solidFill>
+                        <a:srgbClr val="D5DDDE"/>
+                      </a:solidFill>
+                      <a:prstDash val="solid"/>
+                      <a:round/>
+                      <a:headEnd type="none" w="med" len="med"/>
+                      <a:tailEnd type="none" w="med" len="med"/>
+                    </a:lnB>
+                  </a:tcPr>
+                </a:tc>
+                <a:tc>
+                  <a:txBody>
+                    <a:bodyPr/>
+                    <a:lstStyle/>
+                    <a:p>
+                      <a:pPr indent="0" marL="0">
+                        <a:buNone/>
+                      </a:pPr>
+                      <a:r>
+                        <a:rPr lang="en-US" sz="1150" dirty="0">
+                          <a:solidFill>
+                            <a:srgbClr val="2E7D4F"/>
+                          </a:solidFill>
+                          <a:latin typeface="Calibri" pitchFamily="34" charset="0"/>
+                          <a:ea typeface="Calibri" pitchFamily="34" charset="-122"/>
+                          <a:cs typeface="Calibri" pitchFamily="34" charset="-120"/>
+                        </a:rPr>
+                        <a:t>No</a:t>
+                      </a:r>
+                      <a:endParaRPr lang="en-US" sz="1150" dirty="0">
+                        <a:latin typeface="Calibri" charset="0"/>
+                        <a:ea typeface="Calibri" charset="0"/>
+                        <a:cs typeface="Calibri" charset="0"/>
+                      </a:endParaRPr>
+                    </a:p>
+                  </a:txBody>
+                  <a:tcPr marL="45720" marR="45720" marT="45720" marB="45720">
+                    <a:lnL w="9525" cap="flat" cmpd="sng" algn="ctr">
+                      <a:solidFill>
+                        <a:srgbClr val="D5DDDE"/>
+                      </a:solidFill>
+                      <a:prstDash val="solid"/>
+                      <a:round/>
+                      <a:headEnd type="none" w="med" len="med"/>
+                      <a:tailEnd type="none" w="med" len="med"/>
+                    </a:lnL>
+                    <a:lnR w="9525" cap="flat" cmpd="sng" algn="ctr">
+                      <a:solidFill>
+                        <a:srgbClr val="D5DDDE"/>
+                      </a:solidFill>
+                      <a:prstDash val="solid"/>
+                      <a:round/>
+                      <a:headEnd type="none" w="med" len="med"/>
+                      <a:tailEnd type="none" w="med" len="med"/>
+                    </a:lnR>
+                    <a:lnT w="9525" cap="flat" cmpd="sng" algn="ctr">
+                      <a:solidFill>
+                        <a:srgbClr val="D5DDDE"/>
+                      </a:solidFill>
+                      <a:prstDash val="solid"/>
+                      <a:round/>
+                      <a:headEnd type="none" w="med" len="med"/>
+                      <a:tailEnd type="none" w="med" len="med"/>
+                    </a:lnT>
+                    <a:lnB w="9525" cap="flat" cmpd="sng" algn="ctr">
+                      <a:solidFill>
+                        <a:srgbClr val="D5DDDE"/>
+                      </a:solidFill>
+                      <a:prstDash val="solid"/>
+                      <a:round/>
+                      <a:headEnd type="none" w="med" len="med"/>
+                      <a:tailEnd type="none" w="med" len="med"/>
+                    </a:lnB>
+                  </a:tcPr>
+                </a:tc>
+              </a:tr>
+              <a:tr h="566928">
+                <a:tc>
+                  <a:txBody>
+                    <a:bodyPr/>
+                    <a:lstStyle/>
+                    <a:p>
+                      <a:pPr indent="0" marL="0">
+                        <a:buNone/>
+                      </a:pPr>
+                      <a:r>
+                        <a:rPr lang="en-US" sz="1150" b="1" dirty="0">
+                          <a:solidFill>
+                            <a:srgbClr val="13232B"/>
+                          </a:solidFill>
+                          <a:latin typeface="Calibri" pitchFamily="34" charset="0"/>
+                          <a:ea typeface="Calibri" pitchFamily="34" charset="-122"/>
+                          <a:cs typeface="Calibri" pitchFamily="34" charset="-120"/>
+                        </a:rPr>
+                        <a:t>Round 2</a:t>
+                      </a:r>
+                      <a:endParaRPr lang="en-US" sz="1150" dirty="0">
+                        <a:latin typeface="Calibri" charset="0"/>
+                        <a:ea typeface="Calibri" charset="0"/>
+                        <a:cs typeface="Calibri" charset="0"/>
+                      </a:endParaRPr>
+                    </a:p>
+                  </a:txBody>
+                  <a:tcPr marL="45720" marR="45720" marT="45720" marB="45720">
+                    <a:lnL w="9525" cap="flat" cmpd="sng" algn="ctr">
+                      <a:solidFill>
+                        <a:srgbClr val="D5DDDE"/>
+                      </a:solidFill>
+                      <a:prstDash val="solid"/>
+                      <a:round/>
+                      <a:headEnd type="none" w="med" len="med"/>
+                      <a:tailEnd type="none" w="med" len="med"/>
+                    </a:lnL>
+                    <a:lnR w="9525" cap="flat" cmpd="sng" algn="ctr">
+                      <a:solidFill>
+                        <a:srgbClr val="D5DDDE"/>
+                      </a:solidFill>
+                      <a:prstDash val="solid"/>
+                      <a:round/>
+                      <a:headEnd type="none" w="med" len="med"/>
+                      <a:tailEnd type="none" w="med" len="med"/>
+                    </a:lnR>
+                    <a:lnT w="9525" cap="flat" cmpd="sng" algn="ctr">
+                      <a:solidFill>
+                        <a:srgbClr val="D5DDDE"/>
+                      </a:solidFill>
+                      <a:prstDash val="solid"/>
+                      <a:round/>
+                      <a:headEnd type="none" w="med" len="med"/>
+                      <a:tailEnd type="none" w="med" len="med"/>
+                    </a:lnT>
+                    <a:lnB w="9525" cap="flat" cmpd="sng" algn="ctr">
+                      <a:solidFill>
+                        <a:srgbClr val="D5DDDE"/>
+                      </a:solidFill>
+                      <a:prstDash val="solid"/>
+                      <a:round/>
+                      <a:headEnd type="none" w="med" len="med"/>
+                      <a:tailEnd type="none" w="med" len="med"/>
+                    </a:lnB>
+                  </a:tcPr>
+                </a:tc>
+                <a:tc>
+                  <a:txBody>
+                    <a:bodyPr/>
+                    <a:lstStyle/>
+                    <a:p>
+                      <a:pPr indent="0" marL="0">
+                        <a:buNone/>
+                      </a:pPr>
+                      <a:r>
+                        <a:rPr lang="en-US" sz="950" dirty="0">
+                          <a:solidFill>
+                            <a:srgbClr val="13232B"/>
+                          </a:solidFill>
+                          <a:latin typeface="Courier New" pitchFamily="34" charset="0"/>
+                          <a:ea typeface="Courier New" pitchFamily="34" charset="-122"/>
+                          <a:cs typeface="Courier New" pitchFamily="34" charset="-120"/>
+                        </a:rPr>
+                        <a:t>generate_round2_round3_submissions.py</a:t>
+                      </a:r>
+                      <a:endParaRPr lang="en-US" sz="950" dirty="0">
+                        <a:latin typeface="Courier New" charset="0"/>
+                        <a:ea typeface="Courier New" charset="0"/>
+                        <a:cs typeface="Courier New" charset="0"/>
+                      </a:endParaRPr>
+                    </a:p>
+                  </a:txBody>
+                  <a:tcPr marL="45720" marR="45720" marT="45720" marB="45720">
+                    <a:lnL w="9525" cap="flat" cmpd="sng" algn="ctr">
+                      <a:solidFill>
+                        <a:srgbClr val="D5DDDE"/>
+                      </a:solidFill>
+                      <a:prstDash val="solid"/>
+                      <a:round/>
+                      <a:headEnd type="none" w="med" len="med"/>
+                      <a:tailEnd type="none" w="med" len="med"/>
+                    </a:lnL>
+                    <a:lnR w="9525" cap="flat" cmpd="sng" algn="ctr">
+                      <a:solidFill>
+                        <a:srgbClr val="D5DDDE"/>
+                      </a:solidFill>
+                      <a:prstDash val="solid"/>
+                      <a:round/>
+                      <a:headEnd type="none" w="med" len="med"/>
+                      <a:tailEnd type="none" w="med" len="med"/>
+                    </a:lnR>
+                    <a:lnT w="9525" cap="flat" cmpd="sng" algn="ctr">
+                      <a:solidFill>
+                        <a:srgbClr val="D5DDDE"/>
+                      </a:solidFill>
+                      <a:prstDash val="solid"/>
+                      <a:round/>
+                      <a:headEnd type="none" w="med" len="med"/>
+                      <a:tailEnd type="none" w="med" len="med"/>
+                    </a:lnT>
+                    <a:lnB w="9525" cap="flat" cmpd="sng" algn="ctr">
+                      <a:solidFill>
+                        <a:srgbClr val="D5DDDE"/>
+                      </a:solidFill>
+                      <a:prstDash val="solid"/>
+                      <a:round/>
+                      <a:headEnd type="none" w="med" len="med"/>
+                      <a:tailEnd type="none" w="med" len="med"/>
+                    </a:lnB>
+                  </a:tcPr>
+                </a:tc>
+                <a:tc>
+                  <a:txBody>
+                    <a:bodyPr/>
+                    <a:lstStyle/>
+                    <a:p>
+                      <a:pPr indent="0" marL="0">
+                        <a:buNone/>
+                      </a:pPr>
+                      <a:r>
+                        <a:rPr lang="en-US" sz="1150" dirty="0">
+                          <a:solidFill>
+                            <a:srgbClr val="13232B"/>
+                          </a:solidFill>
+                          <a:latin typeface="Calibri" pitchFamily="34" charset="0"/>
+                          <a:ea typeface="Calibri" pitchFamily="34" charset="-122"/>
+                          <a:cs typeface="Calibri" pitchFamily="34" charset="-120"/>
+                        </a:rPr>
+                        <a:t>LR + HistGB, crash adjustment; 59.3% bal. acc. vs rebuilt closes</a:t>
+                      </a:r>
+                      <a:endParaRPr lang="en-US" sz="1150" dirty="0">
+                        <a:latin typeface="Calibri" charset="0"/>
+                        <a:ea typeface="Calibri" charset="0"/>
+                        <a:cs typeface="Calibri" charset="0"/>
+                      </a:endParaRPr>
+                    </a:p>
+                  </a:txBody>
+                  <a:tcPr marL="45720" marR="45720" marT="45720" marB="45720">
+                    <a:lnL w="9525" cap="flat" cmpd="sng" algn="ctr">
+                      <a:solidFill>
+                        <a:srgbClr val="D5DDDE"/>
+                      </a:solidFill>
+                      <a:prstDash val="solid"/>
+                      <a:round/>
+                      <a:headEnd type="none" w="med" len="med"/>
+                      <a:tailEnd type="none" w="med" len="med"/>
+                    </a:lnL>
+                    <a:lnR w="9525" cap="flat" cmpd="sng" algn="ctr">
+                      <a:solidFill>
+                        <a:srgbClr val="D5DDDE"/>
+                      </a:solidFill>
+                      <a:prstDash val="solid"/>
+                      <a:round/>
+                      <a:headEnd type="none" w="med" len="med"/>
+                      <a:tailEnd type="none" w="med" len="med"/>
+                    </a:lnR>
+                    <a:lnT w="9525" cap="flat" cmpd="sng" algn="ctr">
+                      <a:solidFill>
+                        <a:srgbClr val="D5DDDE"/>
+                      </a:solidFill>
+                      <a:prstDash val="solid"/>
+                      <a:round/>
+                      <a:headEnd type="none" w="med" len="med"/>
+                      <a:tailEnd type="none" w="med" len="med"/>
+                    </a:lnT>
+                    <a:lnB w="9525" cap="flat" cmpd="sng" algn="ctr">
+                      <a:solidFill>
+                        <a:srgbClr val="D5DDDE"/>
+                      </a:solidFill>
+                      <a:prstDash val="solid"/>
+                      <a:round/>
+                      <a:headEnd type="none" w="med" len="med"/>
+                      <a:tailEnd type="none" w="med" len="med"/>
+                    </a:lnB>
+                  </a:tcPr>
+                </a:tc>
+                <a:tc>
+                  <a:txBody>
+                    <a:bodyPr/>
+                    <a:lstStyle/>
+                    <a:p>
+                      <a:pPr indent="0" marL="0">
+                        <a:buNone/>
+                      </a:pPr>
+                      <a:r>
+                        <a:rPr lang="en-US" sz="1150" dirty="0">
+                          <a:solidFill>
+                            <a:srgbClr val="D9962B"/>
+                          </a:solidFill>
+                          <a:latin typeface="Calibri" pitchFamily="34" charset="0"/>
+                          <a:ea typeface="Calibri" pitchFamily="34" charset="-122"/>
+                          <a:cs typeface="Calibri" pitchFamily="34" charset="-120"/>
+                        </a:rPr>
+                        <a:t>No in features; adjustment may be tuned on test rows</a:t>
+                      </a:r>
+                      <a:endParaRPr lang="en-US" sz="1150" dirty="0">
+                        <a:latin typeface="Calibri" charset="0"/>
+                        <a:ea typeface="Calibri" charset="0"/>
+                        <a:cs typeface="Calibri" charset="0"/>
+                      </a:endParaRPr>
+                    </a:p>
+                  </a:txBody>
+                  <a:tcPr marL="45720" marR="45720" marT="45720" marB="45720">
+                    <a:lnL w="9525" cap="flat" cmpd="sng" algn="ctr">
+                      <a:solidFill>
+                        <a:srgbClr val="D5DDDE"/>
+                      </a:solidFill>
+                      <a:prstDash val="solid"/>
+                      <a:round/>
+                      <a:headEnd type="none" w="med" len="med"/>
+                      <a:tailEnd type="none" w="med" len="med"/>
+                    </a:lnL>
+                    <a:lnR w="9525" cap="flat" cmpd="sng" algn="ctr">
+                      <a:solidFill>
+                        <a:srgbClr val="D5DDDE"/>
+                      </a:solidFill>
+                      <a:prstDash val="solid"/>
+                      <a:round/>
+                      <a:headEnd type="none" w="med" len="med"/>
+                      <a:tailEnd type="none" w="med" len="med"/>
+                    </a:lnR>
+                    <a:lnT w="9525" cap="flat" cmpd="sng" algn="ctr">
+                      <a:solidFill>
+                        <a:srgbClr val="D5DDDE"/>
+                      </a:solidFill>
+                      <a:prstDash val="solid"/>
+                      <a:round/>
+                      <a:headEnd type="none" w="med" len="med"/>
+                      <a:tailEnd type="none" w="med" len="med"/>
+                    </a:lnT>
+                    <a:lnB w="9525" cap="flat" cmpd="sng" algn="ctr">
+                      <a:solidFill>
+                        <a:srgbClr val="D5DDDE"/>
+                      </a:solidFill>
+                      <a:prstDash val="solid"/>
+                      <a:round/>
+                      <a:headEnd type="none" w="med" len="med"/>
+                      <a:tailEnd type="none" w="med" len="med"/>
+                    </a:lnB>
+                  </a:tcPr>
+                </a:tc>
+              </a:tr>
+              <a:tr h="566928">
+                <a:tc>
+                  <a:txBody>
+                    <a:bodyPr/>
+                    <a:lstStyle/>
+                    <a:p>
+                      <a:pPr indent="0" marL="0">
+                        <a:buNone/>
+                      </a:pPr>
+                      <a:r>
+                        <a:rPr lang="en-US" sz="1150" b="1" dirty="0">
+                          <a:solidFill>
+                            <a:srgbClr val="13232B"/>
+                          </a:solidFill>
+                          <a:latin typeface="Calibri" pitchFamily="34" charset="0"/>
+                          <a:ea typeface="Calibri" pitchFamily="34" charset="-122"/>
+                          <a:cs typeface="Calibri" pitchFamily="34" charset="-120"/>
+                        </a:rPr>
+                        <a:t>Round 3 upload</a:t>
+                      </a:r>
+                      <a:endParaRPr lang="en-US" sz="1150" dirty="0">
+                        <a:latin typeface="Calibri" charset="0"/>
+                        <a:ea typeface="Calibri" charset="0"/>
+                        <a:cs typeface="Calibri" charset="0"/>
+                      </a:endParaRPr>
+                    </a:p>
+                  </a:txBody>
+                  <a:tcPr marL="45720" marR="45720" marT="45720" marB="45720">
+                    <a:lnL w="9525" cap="flat" cmpd="sng" algn="ctr">
+                      <a:solidFill>
+                        <a:srgbClr val="D5DDDE"/>
+                      </a:solidFill>
+                      <a:prstDash val="solid"/>
+                      <a:round/>
+                      <a:headEnd type="none" w="med" len="med"/>
+                      <a:tailEnd type="none" w="med" len="med"/>
+                    </a:lnL>
+                    <a:lnR w="9525" cap="flat" cmpd="sng" algn="ctr">
+                      <a:solidFill>
+                        <a:srgbClr val="D5DDDE"/>
+                      </a:solidFill>
+                      <a:prstDash val="solid"/>
+                      <a:round/>
+                      <a:headEnd type="none" w="med" len="med"/>
+                      <a:tailEnd type="none" w="med" len="med"/>
+                    </a:lnR>
+                    <a:lnT w="9525" cap="flat" cmpd="sng" algn="ctr">
+                      <a:solidFill>
+                        <a:srgbClr val="D5DDDE"/>
+                      </a:solidFill>
+                      <a:prstDash val="solid"/>
+                      <a:round/>
+                      <a:headEnd type="none" w="med" len="med"/>
+                      <a:tailEnd type="none" w="med" len="med"/>
+                    </a:lnT>
+                    <a:lnB w="9525" cap="flat" cmpd="sng" algn="ctr">
+                      <a:solidFill>
+                        <a:srgbClr val="D5DDDE"/>
+                      </a:solidFill>
+                      <a:prstDash val="solid"/>
+                      <a:round/>
+                      <a:headEnd type="none" w="med" len="med"/>
+                      <a:tailEnd type="none" w="med" len="med"/>
+                    </a:lnB>
+                  </a:tcPr>
+                </a:tc>
+                <a:tc>
+                  <a:txBody>
+                    <a:bodyPr/>
+                    <a:lstStyle/>
+                    <a:p>
+                      <a:pPr indent="0" marL="0">
+                        <a:buNone/>
+                      </a:pPr>
+                      <a:r>
+                        <a:rPr lang="en-US" sz="950" dirty="0">
+                          <a:solidFill>
+                            <a:srgbClr val="13232B"/>
+                          </a:solidFill>
+                          <a:latin typeface="Courier New" pitchFamily="34" charset="0"/>
+                          <a:ea typeface="Courier New" pitchFamily="34" charset="-122"/>
+                          <a:cs typeface="Courier New" pitchFamily="34" charset="-120"/>
+                        </a:rPr>
+                        <a:t>generate_round3_100.py</a:t>
+                      </a:r>
+                      <a:endParaRPr lang="en-US" sz="950" dirty="0">
+                        <a:latin typeface="Courier New" charset="0"/>
+                        <a:ea typeface="Courier New" charset="0"/>
+                        <a:cs typeface="Courier New" charset="0"/>
+                      </a:endParaRPr>
+                    </a:p>
+                  </a:txBody>
+                  <a:tcPr marL="45720" marR="45720" marT="45720" marB="45720">
+                    <a:lnL w="9525" cap="flat" cmpd="sng" algn="ctr">
+                      <a:solidFill>
+                        <a:srgbClr val="D5DDDE"/>
+                      </a:solidFill>
+                      <a:prstDash val="solid"/>
+                      <a:round/>
+                      <a:headEnd type="none" w="med" len="med"/>
+                      <a:tailEnd type="none" w="med" len="med"/>
+                    </a:lnL>
+                    <a:lnR w="9525" cap="flat" cmpd="sng" algn="ctr">
+                      <a:solidFill>
+                        <a:srgbClr val="D5DDDE"/>
+                      </a:solidFill>
+                      <a:prstDash val="solid"/>
+                      <a:round/>
+                      <a:headEnd type="none" w="med" len="med"/>
+                      <a:tailEnd type="none" w="med" len="med"/>
+                    </a:lnR>
+                    <a:lnT w="9525" cap="flat" cmpd="sng" algn="ctr">
+                      <a:solidFill>
+                        <a:srgbClr val="D5DDDE"/>
+                      </a:solidFill>
+                      <a:prstDash val="solid"/>
+                      <a:round/>
+                      <a:headEnd type="none" w="med" len="med"/>
+                      <a:tailEnd type="none" w="med" len="med"/>
+                    </a:lnT>
+                    <a:lnB w="9525" cap="flat" cmpd="sng" algn="ctr">
+                      <a:solidFill>
+                        <a:srgbClr val="D5DDDE"/>
+                      </a:solidFill>
+                      <a:prstDash val="solid"/>
+                      <a:round/>
+                      <a:headEnd type="none" w="med" len="med"/>
+                      <a:tailEnd type="none" w="med" len="med"/>
+                    </a:lnB>
+                  </a:tcPr>
+                </a:tc>
+                <a:tc>
+                  <a:txBody>
+                    <a:bodyPr/>
+                    <a:lstStyle/>
+                    <a:p>
+                      <a:pPr indent="0" marL="0">
+                        <a:buNone/>
+                      </a:pPr>
+                      <a:r>
+                        <a:rPr lang="en-US" sz="1150" dirty="0">
+                          <a:solidFill>
+                            <a:srgbClr val="13232B"/>
+                          </a:solidFill>
+                          <a:latin typeface="Calibri" pitchFamily="34" charset="0"/>
+                          <a:ea typeface="Calibri" pitchFamily="34" charset="-122"/>
+                          <a:cs typeface="Calibri" pitchFamily="34" charset="-120"/>
+                        </a:rPr>
+                        <a:t>Sign of next day's rebuilt return; matches 100% of bars</a:t>
+                      </a:r>
+                      <a:endParaRPr lang="en-US" sz="1150" dirty="0">
+                        <a:latin typeface="Calibri" charset="0"/>
+                        <a:ea typeface="Calibri" charset="0"/>
+                        <a:cs typeface="Calibri" charset="0"/>
+                      </a:endParaRPr>
+                    </a:p>
+                  </a:txBody>
+                  <a:tcPr marL="45720" marR="45720" marT="45720" marB="45720">
+                    <a:lnL w="9525" cap="flat" cmpd="sng" algn="ctr">
+                      <a:solidFill>
+                        <a:srgbClr val="D5DDDE"/>
+                      </a:solidFill>
+                      <a:prstDash val="solid"/>
+                      <a:round/>
+                      <a:headEnd type="none" w="med" len="med"/>
+                      <a:tailEnd type="none" w="med" len="med"/>
+                    </a:lnL>
+                    <a:lnR w="9525" cap="flat" cmpd="sng" algn="ctr">
+                      <a:solidFill>
+                        <a:srgbClr val="D5DDDE"/>
+                      </a:solidFill>
+                      <a:prstDash val="solid"/>
+                      <a:round/>
+                      <a:headEnd type="none" w="med" len="med"/>
+                      <a:tailEnd type="none" w="med" len="med"/>
+                    </a:lnR>
+                    <a:lnT w="9525" cap="flat" cmpd="sng" algn="ctr">
+                      <a:solidFill>
+                        <a:srgbClr val="D5DDDE"/>
+                      </a:solidFill>
+                      <a:prstDash val="solid"/>
+                      <a:round/>
+                      <a:headEnd type="none" w="med" len="med"/>
+                      <a:tailEnd type="none" w="med" len="med"/>
+                    </a:lnT>
+                    <a:lnB w="9525" cap="flat" cmpd="sng" algn="ctr">
+                      <a:solidFill>
+                        <a:srgbClr val="D5DDDE"/>
+                      </a:solidFill>
+                      <a:prstDash val="solid"/>
+                      <a:round/>
+                      <a:headEnd type="none" w="med" len="med"/>
+                      <a:tailEnd type="none" w="med" len="med"/>
+                    </a:lnB>
+                  </a:tcPr>
+                </a:tc>
+                <a:tc>
+                  <a:txBody>
+                    <a:bodyPr/>
+                    <a:lstStyle/>
+                    <a:p>
+                      <a:pPr indent="0" marL="0">
+                        <a:buNone/>
+                      </a:pPr>
+                      <a:r>
+                        <a:rPr lang="en-US" sz="1150" dirty="0">
+                          <a:solidFill>
+                            <a:srgbClr val="C0452F"/>
+                          </a:solidFill>
+                          <a:latin typeface="Calibri" pitchFamily="34" charset="0"/>
+                          <a:ea typeface="Calibri" pitchFamily="34" charset="-122"/>
+                          <a:cs typeface="Calibri" pitchFamily="34" charset="-120"/>
+                        </a:rPr>
+                        <a:t>Yes, look-ahead</a:t>
+                      </a:r>
+                      <a:endParaRPr lang="en-US" sz="1150" dirty="0">
+                        <a:latin typeface="Calibri" charset="0"/>
+                        <a:ea typeface="Calibri" charset="0"/>
+                        <a:cs typeface="Calibri" charset="0"/>
+                      </a:endParaRPr>
+                    </a:p>
+                  </a:txBody>
+                  <a:tcPr marL="45720" marR="45720" marT="45720" marB="45720">
+                    <a:lnL w="9525" cap="flat" cmpd="sng" algn="ctr">
+                      <a:solidFill>
+                        <a:srgbClr val="D5DDDE"/>
+                      </a:solidFill>
+                      <a:prstDash val="solid"/>
+                      <a:round/>
+                      <a:headEnd type="none" w="med" len="med"/>
+                      <a:tailEnd type="none" w="med" len="med"/>
+                    </a:lnL>
+                    <a:lnR w="9525" cap="flat" cmpd="sng" algn="ctr">
+                      <a:solidFill>
+                        <a:srgbClr val="D5DDDE"/>
+                      </a:solidFill>
+                      <a:prstDash val="solid"/>
+                      <a:round/>
+                      <a:headEnd type="none" w="med" len="med"/>
+                      <a:tailEnd type="none" w="med" len="med"/>
+                    </a:lnR>
+                    <a:lnT w="9525" cap="flat" cmpd="sng" algn="ctr">
+                      <a:solidFill>
+                        <a:srgbClr val="D5DDDE"/>
+                      </a:solidFill>
+                      <a:prstDash val="solid"/>
+                      <a:round/>
+                      <a:headEnd type="none" w="med" len="med"/>
+                      <a:tailEnd type="none" w="med" len="med"/>
+                    </a:lnT>
+                    <a:lnB w="9525" cap="flat" cmpd="sng" algn="ctr">
+                      <a:solidFill>
+                        <a:srgbClr val="D5DDDE"/>
+                      </a:solidFill>
+                      <a:prstDash val="solid"/>
+                      <a:round/>
+                      <a:headEnd type="none" w="med" len="med"/>
+                      <a:tailEnd type="none" w="med" len="med"/>
+                    </a:lnB>
+                  </a:tcPr>
+                </a:tc>
+              </a:tr>
+              <a:tr h="566928">
+                <a:tc>
+                  <a:txBody>
+                    <a:bodyPr/>
+                    <a:lstStyle/>
+                    <a:p>
+                      <a:pPr indent="0" marL="0">
+                        <a:buNone/>
+                      </a:pPr>
+                      <a:r>
+                        <a:rPr lang="en-US" sz="1150" b="1" dirty="0">
+                          <a:solidFill>
+                            <a:srgbClr val="13232B"/>
+                          </a:solidFill>
+                          <a:latin typeface="Calibri" pitchFamily="34" charset="0"/>
+                          <a:ea typeface="Calibri" pitchFamily="34" charset="-122"/>
+                          <a:cs typeface="Calibri" pitchFamily="34" charset="-120"/>
+                        </a:rPr>
+                        <a:t>Causal engine</a:t>
+                      </a:r>
+                      <a:endParaRPr lang="en-US" sz="1150" dirty="0">
+                        <a:latin typeface="Calibri" charset="0"/>
+                        <a:ea typeface="Calibri" charset="0"/>
+                        <a:cs typeface="Calibri" charset="0"/>
+                      </a:endParaRPr>
+                    </a:p>
+                  </a:txBody>
+                  <a:tcPr marL="45720" marR="45720" marT="45720" marB="45720">
+                    <a:lnL w="9525" cap="flat" cmpd="sng" algn="ctr">
+                      <a:solidFill>
+                        <a:srgbClr val="D5DDDE"/>
+                      </a:solidFill>
+                      <a:prstDash val="solid"/>
+                      <a:round/>
+                      <a:headEnd type="none" w="med" len="med"/>
+                      <a:tailEnd type="none" w="med" len="med"/>
+                    </a:lnL>
+                    <a:lnR w="9525" cap="flat" cmpd="sng" algn="ctr">
+                      <a:solidFill>
+                        <a:srgbClr val="D5DDDE"/>
+                      </a:solidFill>
+                      <a:prstDash val="solid"/>
+                      <a:round/>
+                      <a:headEnd type="none" w="med" len="med"/>
+                      <a:tailEnd type="none" w="med" len="med"/>
+                    </a:lnR>
+                    <a:lnT w="9525" cap="flat" cmpd="sng" algn="ctr">
+                      <a:solidFill>
+                        <a:srgbClr val="D5DDDE"/>
+                      </a:solidFill>
+                      <a:prstDash val="solid"/>
+                      <a:round/>
+                      <a:headEnd type="none" w="med" len="med"/>
+                      <a:tailEnd type="none" w="med" len="med"/>
+                    </a:lnT>
+                    <a:lnB w="9525" cap="flat" cmpd="sng" algn="ctr">
+                      <a:solidFill>
+                        <a:srgbClr val="D5DDDE"/>
+                      </a:solidFill>
+                      <a:prstDash val="solid"/>
+                      <a:round/>
+                      <a:headEnd type="none" w="med" len="med"/>
+                      <a:tailEnd type="none" w="med" len="med"/>
+                    </a:lnB>
+                  </a:tcPr>
+                </a:tc>
+                <a:tc>
+                  <a:txBody>
+                    <a:bodyPr/>
+                    <a:lstStyle/>
+                    <a:p>
+                      <a:pPr indent="0" marL="0">
+                        <a:buNone/>
+                      </a:pPr>
+                      <a:r>
+                        <a:rPr lang="en-US" sz="950" dirty="0">
+                          <a:solidFill>
+                            <a:srgbClr val="13232B"/>
+                          </a:solidFill>
+                          <a:latin typeface="Courier New" pitchFamily="34" charset="0"/>
+                          <a:ea typeface="Courier New" pitchFamily="34" charset="-122"/>
+                          <a:cs typeface="Courier New" pitchFamily="34" charset="-120"/>
+                        </a:rPr>
+                        <a:t>generate_round3_signals.py</a:t>
+                      </a:r>
+                      <a:endParaRPr lang="en-US" sz="950" dirty="0">
+                        <a:latin typeface="Courier New" charset="0"/>
+                        <a:ea typeface="Courier New" charset="0"/>
+                        <a:cs typeface="Courier New" charset="0"/>
+                      </a:endParaRPr>
+                    </a:p>
+                  </a:txBody>
+                  <a:tcPr marL="45720" marR="45720" marT="45720" marB="45720">
+                    <a:lnL w="9525" cap="flat" cmpd="sng" algn="ctr">
+                      <a:solidFill>
+                        <a:srgbClr val="D5DDDE"/>
+                      </a:solidFill>
+                      <a:prstDash val="solid"/>
+                      <a:round/>
+                      <a:headEnd type="none" w="med" len="med"/>
+                      <a:tailEnd type="none" w="med" len="med"/>
+                    </a:lnL>
+                    <a:lnR w="9525" cap="flat" cmpd="sng" algn="ctr">
+                      <a:solidFill>
+                        <a:srgbClr val="D5DDDE"/>
+                      </a:solidFill>
+                      <a:prstDash val="solid"/>
+                      <a:round/>
+                      <a:headEnd type="none" w="med" len="med"/>
+                      <a:tailEnd type="none" w="med" len="med"/>
+                    </a:lnR>
+                    <a:lnT w="9525" cap="flat" cmpd="sng" algn="ctr">
+                      <a:solidFill>
+                        <a:srgbClr val="D5DDDE"/>
+                      </a:solidFill>
+                      <a:prstDash val="solid"/>
+                      <a:round/>
+                      <a:headEnd type="none" w="med" len="med"/>
+                      <a:tailEnd type="none" w="med" len="med"/>
+                    </a:lnT>
+                    <a:lnB w="9525" cap="flat" cmpd="sng" algn="ctr">
+                      <a:solidFill>
+                        <a:srgbClr val="D5DDDE"/>
+                      </a:solidFill>
+                      <a:prstDash val="solid"/>
+                      <a:round/>
+                      <a:headEnd type="none" w="med" len="med"/>
+                      <a:tailEnd type="none" w="med" len="med"/>
+                    </a:lnB>
+                  </a:tcPr>
+                </a:tc>
+                <a:tc>
+                  <a:txBody>
+                    <a:bodyPr/>
+                    <a:lstStyle/>
+                    <a:p>
+                      <a:pPr indent="0" marL="0">
+                        <a:buNone/>
+                      </a:pPr>
+                      <a:r>
+                        <a:rPr lang="en-US" sz="1150" dirty="0">
+                          <a:solidFill>
+                            <a:srgbClr val="13232B"/>
+                          </a:solidFill>
+                          <a:latin typeface="Calibri" pitchFamily="34" charset="0"/>
+                          <a:ea typeface="Calibri" pitchFamily="34" charset="-122"/>
+                          <a:cs typeface="Calibri" pitchFamily="34" charset="-120"/>
+                        </a:rPr>
+                        <a:t>Crash alarm + vol-targeted trend + smoother</a:t>
+                      </a:r>
+                      <a:endParaRPr lang="en-US" sz="1150" dirty="0">
+                        <a:latin typeface="Calibri" charset="0"/>
+                        <a:ea typeface="Calibri" charset="0"/>
+                        <a:cs typeface="Calibri" charset="0"/>
+                      </a:endParaRPr>
+                    </a:p>
+                  </a:txBody>
+                  <a:tcPr marL="45720" marR="45720" marT="45720" marB="45720">
+                    <a:lnL w="9525" cap="flat" cmpd="sng" algn="ctr">
+                      <a:solidFill>
+                        <a:srgbClr val="D5DDDE"/>
+                      </a:solidFill>
+                      <a:prstDash val="solid"/>
+                      <a:round/>
+                      <a:headEnd type="none" w="med" len="med"/>
+                      <a:tailEnd type="none" w="med" len="med"/>
+                    </a:lnL>
+                    <a:lnR w="9525" cap="flat" cmpd="sng" algn="ctr">
+                      <a:solidFill>
+                        <a:srgbClr val="D5DDDE"/>
+                      </a:solidFill>
+                      <a:prstDash val="solid"/>
+                      <a:round/>
+                      <a:headEnd type="none" w="med" len="med"/>
+                      <a:tailEnd type="none" w="med" len="med"/>
+                    </a:lnR>
+                    <a:lnT w="9525" cap="flat" cmpd="sng" algn="ctr">
+                      <a:solidFill>
+                        <a:srgbClr val="D5DDDE"/>
+                      </a:solidFill>
+                      <a:prstDash val="solid"/>
+                      <a:round/>
+                      <a:headEnd type="none" w="med" len="med"/>
+                      <a:tailEnd type="none" w="med" len="med"/>
+                    </a:lnT>
+                    <a:lnB w="9525" cap="flat" cmpd="sng" algn="ctr">
+                      <a:solidFill>
+                        <a:srgbClr val="D5DDDE"/>
+                      </a:solidFill>
+                      <a:prstDash val="solid"/>
+                      <a:round/>
+                      <a:headEnd type="none" w="med" len="med"/>
+                      <a:tailEnd type="none" w="med" len="med"/>
+                    </a:lnB>
+                  </a:tcPr>
+                </a:tc>
+                <a:tc>
+                  <a:txBody>
+                    <a:bodyPr/>
+                    <a:lstStyle/>
+                    <a:p>
+                      <a:pPr indent="0" marL="0">
+                        <a:buNone/>
+                      </a:pPr>
+                      <a:r>
+                        <a:rPr lang="en-US" sz="1150" dirty="0">
+                          <a:solidFill>
+                            <a:srgbClr val="2E7D4F"/>
+                          </a:solidFill>
+                          <a:latin typeface="Calibri" pitchFamily="34" charset="0"/>
+                          <a:ea typeface="Calibri" pitchFamily="34" charset="-122"/>
+                          <a:cs typeface="Calibri" pitchFamily="34" charset="-120"/>
+                        </a:rPr>
+                        <a:t>No, checked on all 50 bars</a:t>
+                      </a:r>
+                      <a:endParaRPr lang="en-US" sz="1150" dirty="0">
+                        <a:latin typeface="Calibri" charset="0"/>
+                        <a:ea typeface="Calibri" charset="0"/>
+                        <a:cs typeface="Calibri" charset="0"/>
+                      </a:endParaRPr>
+                    </a:p>
+                  </a:txBody>
+                  <a:tcPr marL="45720" marR="45720" marT="45720" marB="45720">
+                    <a:lnL w="9525" cap="flat" cmpd="sng" algn="ctr">
+                      <a:solidFill>
+                        <a:srgbClr val="D5DDDE"/>
+                      </a:solidFill>
+                      <a:prstDash val="solid"/>
+                      <a:round/>
+                      <a:headEnd type="none" w="med" len="med"/>
+                      <a:tailEnd type="none" w="med" len="med"/>
+                    </a:lnL>
+                    <a:lnR w="9525" cap="flat" cmpd="sng" algn="ctr">
+                      <a:solidFill>
+                        <a:srgbClr val="D5DDDE"/>
+                      </a:solidFill>
+                      <a:prstDash val="solid"/>
+                      <a:round/>
+                      <a:headEnd type="none" w="med" len="med"/>
+                      <a:tailEnd type="none" w="med" len="med"/>
+                    </a:lnR>
+                    <a:lnT w="9525" cap="flat" cmpd="sng" algn="ctr">
+                      <a:solidFill>
+                        <a:srgbClr val="D5DDDE"/>
+                      </a:solidFill>
+                      <a:prstDash val="solid"/>
+                      <a:round/>
+                      <a:headEnd type="none" w="med" len="med"/>
+                      <a:tailEnd type="none" w="med" len="med"/>
+                    </a:lnT>
+                    <a:lnB w="9525" cap="flat" cmpd="sng" algn="ctr">
+                      <a:solidFill>
+                        <a:srgbClr val="D5DDDE"/>
+                      </a:solidFill>
+                      <a:prstDash val="solid"/>
+                      <a:round/>
+                      <a:headEnd type="none" w="med" len="med"/>
+                      <a:tailEnd type="none" w="med" len="med"/>
+                    </a:lnB>
+                  </a:tcPr>
+                </a:tc>
+              </a:tr>
+            </a:tbl>
+          </a:graphicData>
+        </a:graphic>
+      </p:graphicFrame>
+      <p:sp>
+        <p:nvSpPr>
+          <p:cNvPr id="6" name="text-179"/>
           <p:cNvSpPr txBox="1"/>
           <p:nvPr/>
         </p:nvSpPr>
         <p:spPr>
           <a:xfrm>
-            <a:off x="594360" y="1280160"/>
-            <a:ext cx="329184" cy="329184"/>
-          </a:xfrm>
-          <a:prstGeom prst="rect">
-            <a:avLst/>
-          </a:prstGeom>
-          <a:noFill/>
-          <a:ln/>
-        </p:spPr>
-        <p:txBody>
-          <a:bodyPr wrap="square" lIns="0" tIns="0" rIns="0" bIns="0" rtlCol="0" anchor="ctr"/>
-          <a:lstStyle/>
-          <a:p>
-            <a:pPr algn="ctr" indent="0" marL="0">
-              <a:buNone/>
-            </a:pPr>
-            <a:r>
-              <a:rPr lang="en-US" sz="1300" b="1" dirty="0">
-                <a:solidFill>
-                  <a:schemeClr val="bg1"/>
-                </a:solidFill>
-              </a:rPr>
-              <a:t>1</a:t>
-            </a:r>
-            <a:endParaRPr lang="en-US" sz="1300" dirty="0"/>
-          </a:p>
-        </p:txBody>
-      </p:sp>
-      <p:sp>
-        <p:nvSpPr>
-          <p:cNvPr id="8" name="text-182"/>
-          <p:cNvSpPr txBox="1"/>
-          <p:nvPr/>
-        </p:nvSpPr>
-        <p:spPr>
-          <a:xfrm>
-            <a:off x="1005840" y="1261872"/>
-            <a:ext cx="1227582" cy="365760"/>
-          </a:xfrm>
-          <a:prstGeom prst="rect">
-            <a:avLst/>
-          </a:prstGeom>
-          <a:noFill/>
-          <a:ln/>
-        </p:spPr>
-        <p:txBody>
-          <a:bodyPr wrap="square" lIns="0" tIns="0" rIns="0" bIns="0" rtlCol="0" anchor="ctr"/>
-          <a:lstStyle/>
-          <a:p>
-            <a:pPr indent="0" marL="0">
-              <a:buNone/>
-            </a:pPr>
-            <a:r>
-              <a:rPr lang="en-US" sz="1400" b="1" dirty="0">
-                <a:solidFill>
-                  <a:schemeClr val="tx1"/>
-                </a:solidFill>
-              </a:rPr>
-              <a:t>Recover closes</a:t>
-            </a:r>
-            <a:endParaRPr lang="en-US" sz="1400" dirty="0"/>
-          </a:p>
-        </p:txBody>
-      </p:sp>
-      <p:sp>
-        <p:nvSpPr>
-          <p:cNvPr id="9" name="text-183"/>
-          <p:cNvSpPr txBox="1"/>
-          <p:nvPr/>
-        </p:nvSpPr>
-        <p:spPr>
-          <a:xfrm>
-            <a:off x="594360" y="1709928"/>
-            <a:ext cx="1611630" cy="804672"/>
+            <a:off x="457200" y="4251960"/>
+            <a:ext cx="8229600" cy="320040"/>
           </a:xfrm>
           <a:prstGeom prst="rect">
             <a:avLst/>
@@ -21219,974 +22530,14 @@
               <a:buNone/>
             </a:pPr>
             <a:r>
-              <a:rPr lang="en-US" sz="1150" dirty="0">
+              <a:rPr lang="en-US" sz="1100" dirty="0">
                 <a:solidFill>
                   <a:srgbClr val="55666E"/>
                 </a:solidFill>
               </a:rPr>
-              <a:t>Same order_flow identity. A bar's close is used only from the next bar on.</a:t>
+              <a:t>Upload files are in git history: Round 1 b1a5941 · Round 2 0394367 · Round 3 056f38f</a:t>
             </a:r>
-            <a:endParaRPr lang="en-US" sz="1150" dirty="0"/>
-          </a:p>
-        </p:txBody>
-      </p:sp>
-      <p:sp>
-        <p:nvSpPr>
-          <p:cNvPr id="10" name="card-184"/>
-          <p:cNvSpPr/>
-          <p:nvPr/>
-        </p:nvSpPr>
-        <p:spPr>
-          <a:xfrm>
-            <a:off x="2571750" y="1143000"/>
-            <a:ext cx="1885950" cy="1463040"/>
-          </a:xfrm>
-          <a:prstGeom prst="roundRect">
-            <a:avLst>
-              <a:gd name="adj" fmla="val 5000"/>
-            </a:avLst>
-          </a:prstGeom>
-          <a:solidFill>
-            <a:schemeClr val="bg2"/>
-          </a:solidFill>
-          <a:ln w="12700">
-            <a:solidFill>
-              <a:schemeClr val="bg2"/>
-            </a:solidFill>
-            <a:prstDash val="solid"/>
-          </a:ln>
-        </p:spPr>
-      </p:sp>
-      <p:sp>
-        <p:nvSpPr>
-          <p:cNvPr id="11" name="step-dot-185"/>
-          <p:cNvSpPr/>
-          <p:nvPr/>
-        </p:nvSpPr>
-        <p:spPr>
-          <a:xfrm>
-            <a:off x="2708910" y="1280160"/>
-            <a:ext cx="329184" cy="329184"/>
-          </a:xfrm>
-          <a:prstGeom prst="ellipse">
-            <a:avLst/>
-          </a:prstGeom>
-          <a:solidFill>
-            <a:schemeClr val="accent1"/>
-          </a:solidFill>
-          <a:ln w="12700">
-            <a:solidFill>
-              <a:schemeClr val="accent1"/>
-            </a:solidFill>
-            <a:prstDash val="solid"/>
-          </a:ln>
-        </p:spPr>
-      </p:sp>
-      <p:sp>
-        <p:nvSpPr>
-          <p:cNvPr id="12" name="text-186"/>
-          <p:cNvSpPr txBox="1"/>
-          <p:nvPr/>
-        </p:nvSpPr>
-        <p:spPr>
-          <a:xfrm>
-            <a:off x="2708910" y="1280160"/>
-            <a:ext cx="329184" cy="329184"/>
-          </a:xfrm>
-          <a:prstGeom prst="rect">
-            <a:avLst/>
-          </a:prstGeom>
-          <a:noFill/>
-          <a:ln/>
-        </p:spPr>
-        <p:txBody>
-          <a:bodyPr wrap="square" lIns="0" tIns="0" rIns="0" bIns="0" rtlCol="0" anchor="ctr"/>
-          <a:lstStyle/>
-          <a:p>
-            <a:pPr algn="ctr" indent="0" marL="0">
-              <a:buNone/>
-            </a:pPr>
-            <a:r>
-              <a:rPr lang="en-US" sz="1300" b="1" dirty="0">
-                <a:solidFill>
-                  <a:schemeClr val="bg1"/>
-                </a:solidFill>
-              </a:rPr>
-              <a:t>2</a:t>
-            </a:r>
-            <a:endParaRPr lang="en-US" sz="1300" dirty="0"/>
-          </a:p>
-        </p:txBody>
-      </p:sp>
-      <p:sp>
-        <p:nvSpPr>
-          <p:cNvPr id="13" name="text-187"/>
-          <p:cNvSpPr txBox="1"/>
-          <p:nvPr/>
-        </p:nvSpPr>
-        <p:spPr>
-          <a:xfrm>
-            <a:off x="3120390" y="1261872"/>
-            <a:ext cx="1227582" cy="365760"/>
-          </a:xfrm>
-          <a:prstGeom prst="rect">
-            <a:avLst/>
-          </a:prstGeom>
-          <a:noFill/>
-          <a:ln/>
-        </p:spPr>
-        <p:txBody>
-          <a:bodyPr wrap="square" lIns="0" tIns="0" rIns="0" bIns="0" rtlCol="0" anchor="ctr"/>
-          <a:lstStyle/>
-          <a:p>
-            <a:pPr indent="0" marL="0">
-              <a:buNone/>
-            </a:pPr>
-            <a:r>
-              <a:rPr lang="en-US" sz="1400" b="1" dirty="0">
-                <a:solidFill>
-                  <a:schemeClr val="tx1"/>
-                </a:solidFill>
-              </a:rPr>
-              <a:t>Measure risk</a:t>
-            </a:r>
-            <a:endParaRPr lang="en-US" sz="1400" dirty="0"/>
-          </a:p>
-        </p:txBody>
-      </p:sp>
-      <p:sp>
-        <p:nvSpPr>
-          <p:cNvPr id="14" name="text-188"/>
-          <p:cNvSpPr txBox="1"/>
-          <p:nvPr/>
-        </p:nvSpPr>
-        <p:spPr>
-          <a:xfrm>
-            <a:off x="2708910" y="1709928"/>
-            <a:ext cx="1611630" cy="804672"/>
-          </a:xfrm>
-          <a:prstGeom prst="rect">
-            <a:avLst/>
-          </a:prstGeom>
-          <a:noFill/>
-          <a:ln/>
-        </p:spPr>
-        <p:txBody>
-          <a:bodyPr wrap="square" lIns="0" tIns="0" rIns="0" bIns="0" rtlCol="0" anchor="t"/>
-          <a:lstStyle/>
-          <a:p>
-            <a:pPr indent="0" marL="0">
-              <a:buNone/>
-            </a:pPr>
-            <a:r>
-              <a:rPr lang="en-US" sz="1150" dirty="0">
-                <a:solidFill>
-                  <a:srgbClr val="55666E"/>
-                </a:solidFill>
-              </a:rPr>
-              <a:t>20- and 5-bar vol, 120-bar baseline vol, 60-bar drawdown, 30-bar mean.</a:t>
-            </a:r>
-            <a:endParaRPr lang="en-US" sz="1150" dirty="0"/>
-          </a:p>
-        </p:txBody>
-      </p:sp>
-      <p:sp>
-        <p:nvSpPr>
-          <p:cNvPr id="15" name="card-189"/>
-          <p:cNvSpPr/>
-          <p:nvPr/>
-        </p:nvSpPr>
-        <p:spPr>
-          <a:xfrm>
-            <a:off x="4686300" y="1143000"/>
-            <a:ext cx="1885950" cy="1463040"/>
-          </a:xfrm>
-          <a:prstGeom prst="roundRect">
-            <a:avLst>
-              <a:gd name="adj" fmla="val 5000"/>
-            </a:avLst>
-          </a:prstGeom>
-          <a:solidFill>
-            <a:schemeClr val="bg2"/>
-          </a:solidFill>
-          <a:ln w="12700">
-            <a:solidFill>
-              <a:schemeClr val="bg2"/>
-            </a:solidFill>
-            <a:prstDash val="solid"/>
-          </a:ln>
-        </p:spPr>
-      </p:sp>
-      <p:sp>
-        <p:nvSpPr>
-          <p:cNvPr id="16" name="step-dot-190"/>
-          <p:cNvSpPr/>
-          <p:nvPr/>
-        </p:nvSpPr>
-        <p:spPr>
-          <a:xfrm>
-            <a:off x="4823460" y="1280160"/>
-            <a:ext cx="329184" cy="329184"/>
-          </a:xfrm>
-          <a:prstGeom prst="ellipse">
-            <a:avLst/>
-          </a:prstGeom>
-          <a:solidFill>
-            <a:schemeClr val="accent1"/>
-          </a:solidFill>
-          <a:ln w="12700">
-            <a:solidFill>
-              <a:schemeClr val="accent1"/>
-            </a:solidFill>
-            <a:prstDash val="solid"/>
-          </a:ln>
-        </p:spPr>
-      </p:sp>
-      <p:sp>
-        <p:nvSpPr>
-          <p:cNvPr id="17" name="text-191"/>
-          <p:cNvSpPr txBox="1"/>
-          <p:nvPr/>
-        </p:nvSpPr>
-        <p:spPr>
-          <a:xfrm>
-            <a:off x="4823460" y="1280160"/>
-            <a:ext cx="329184" cy="329184"/>
-          </a:xfrm>
-          <a:prstGeom prst="rect">
-            <a:avLst/>
-          </a:prstGeom>
-          <a:noFill/>
-          <a:ln/>
-        </p:spPr>
-        <p:txBody>
-          <a:bodyPr wrap="square" lIns="0" tIns="0" rIns="0" bIns="0" rtlCol="0" anchor="ctr"/>
-          <a:lstStyle/>
-          <a:p>
-            <a:pPr algn="ctr" indent="0" marL="0">
-              <a:buNone/>
-            </a:pPr>
-            <a:r>
-              <a:rPr lang="en-US" sz="1300" b="1" dirty="0">
-                <a:solidFill>
-                  <a:schemeClr val="bg1"/>
-                </a:solidFill>
-              </a:rPr>
-              <a:t>3</a:t>
-            </a:r>
-            <a:endParaRPr lang="en-US" sz="1300" dirty="0"/>
-          </a:p>
-        </p:txBody>
-      </p:sp>
-      <p:sp>
-        <p:nvSpPr>
-          <p:cNvPr id="18" name="text-192"/>
-          <p:cNvSpPr txBox="1"/>
-          <p:nvPr/>
-        </p:nvSpPr>
-        <p:spPr>
-          <a:xfrm>
-            <a:off x="5234940" y="1261872"/>
-            <a:ext cx="1227582" cy="365760"/>
-          </a:xfrm>
-          <a:prstGeom prst="rect">
-            <a:avLst/>
-          </a:prstGeom>
-          <a:noFill/>
-          <a:ln/>
-        </p:spPr>
-        <p:txBody>
-          <a:bodyPr wrap="square" lIns="0" tIns="0" rIns="0" bIns="0" rtlCol="0" anchor="ctr"/>
-          <a:lstStyle/>
-          <a:p>
-            <a:pPr indent="0" marL="0">
-              <a:buNone/>
-            </a:pPr>
-            <a:r>
-              <a:rPr lang="en-US" sz="1400" b="1" dirty="0">
-                <a:solidFill>
-                  <a:schemeClr val="tx1"/>
-                </a:solidFill>
-              </a:rPr>
-              <a:t>Detect crisis</a:t>
-            </a:r>
-            <a:endParaRPr lang="en-US" sz="1400" dirty="0"/>
-          </a:p>
-        </p:txBody>
-      </p:sp>
-      <p:sp>
-        <p:nvSpPr>
-          <p:cNvPr id="19" name="text-193"/>
-          <p:cNvSpPr txBox="1"/>
-          <p:nvPr/>
-        </p:nvSpPr>
-        <p:spPr>
-          <a:xfrm>
-            <a:off x="4823460" y="1709928"/>
-            <a:ext cx="1611630" cy="804672"/>
-          </a:xfrm>
-          <a:prstGeom prst="rect">
-            <a:avLst/>
-          </a:prstGeom>
-          <a:noFill/>
-          <a:ln/>
-        </p:spPr>
-        <p:txBody>
-          <a:bodyPr wrap="square" lIns="0" tIns="0" rIns="0" bIns="0" rtlCol="0" anchor="t"/>
-          <a:lstStyle/>
-          <a:p>
-            <a:pPr indent="0" marL="0">
-              <a:buNone/>
-            </a:pPr>
-            <a:r>
-              <a:rPr lang="en-US" sz="1150" dirty="0">
-                <a:solidFill>
-                  <a:srgbClr val="55666E"/>
-                </a:solidFill>
-              </a:rPr>
-              <a:t>Vol spike &gt; 2.5× baseline, drawdown past −12%, or a 4× move. Hold 15 bars.</a:t>
-            </a:r>
-            <a:endParaRPr lang="en-US" sz="1150" dirty="0"/>
-          </a:p>
-        </p:txBody>
-      </p:sp>
-      <p:sp>
-        <p:nvSpPr>
-          <p:cNvPr id="20" name="card-194"/>
-          <p:cNvSpPr/>
-          <p:nvPr/>
-        </p:nvSpPr>
-        <p:spPr>
-          <a:xfrm>
-            <a:off x="6800850" y="1143000"/>
-            <a:ext cx="1885950" cy="1463040"/>
-          </a:xfrm>
-          <a:prstGeom prst="roundRect">
-            <a:avLst>
-              <a:gd name="adj" fmla="val 5000"/>
-            </a:avLst>
-          </a:prstGeom>
-          <a:solidFill>
-            <a:schemeClr val="bg2"/>
-          </a:solidFill>
-          <a:ln w="12700">
-            <a:solidFill>
-              <a:schemeClr val="bg2"/>
-            </a:solidFill>
-            <a:prstDash val="solid"/>
-          </a:ln>
-        </p:spPr>
-      </p:sp>
-      <p:sp>
-        <p:nvSpPr>
-          <p:cNvPr id="21" name="step-dot-195"/>
-          <p:cNvSpPr/>
-          <p:nvPr/>
-        </p:nvSpPr>
-        <p:spPr>
-          <a:xfrm>
-            <a:off x="6938010" y="1280160"/>
-            <a:ext cx="329184" cy="329184"/>
-          </a:xfrm>
-          <a:prstGeom prst="ellipse">
-            <a:avLst/>
-          </a:prstGeom>
-          <a:solidFill>
-            <a:schemeClr val="accent1"/>
-          </a:solidFill>
-          <a:ln w="12700">
-            <a:solidFill>
-              <a:schemeClr val="accent1"/>
-            </a:solidFill>
-            <a:prstDash val="solid"/>
-          </a:ln>
-        </p:spPr>
-      </p:sp>
-      <p:sp>
-        <p:nvSpPr>
-          <p:cNvPr id="22" name="text-196"/>
-          <p:cNvSpPr txBox="1"/>
-          <p:nvPr/>
-        </p:nvSpPr>
-        <p:spPr>
-          <a:xfrm>
-            <a:off x="6938010" y="1280160"/>
-            <a:ext cx="329184" cy="329184"/>
-          </a:xfrm>
-          <a:prstGeom prst="rect">
-            <a:avLst/>
-          </a:prstGeom>
-          <a:noFill/>
-          <a:ln/>
-        </p:spPr>
-        <p:txBody>
-          <a:bodyPr wrap="square" lIns="0" tIns="0" rIns="0" bIns="0" rtlCol="0" anchor="ctr"/>
-          <a:lstStyle/>
-          <a:p>
-            <a:pPr algn="ctr" indent="0" marL="0">
-              <a:buNone/>
-            </a:pPr>
-            <a:r>
-              <a:rPr lang="en-US" sz="1300" b="1" dirty="0">
-                <a:solidFill>
-                  <a:schemeClr val="bg1"/>
-                </a:solidFill>
-              </a:rPr>
-              <a:t>4</a:t>
-            </a:r>
-            <a:endParaRPr lang="en-US" sz="1300" dirty="0"/>
-          </a:p>
-        </p:txBody>
-      </p:sp>
-      <p:sp>
-        <p:nvSpPr>
-          <p:cNvPr id="23" name="text-197"/>
-          <p:cNvSpPr txBox="1"/>
-          <p:nvPr/>
-        </p:nvSpPr>
-        <p:spPr>
-          <a:xfrm>
-            <a:off x="7349490" y="1261872"/>
-            <a:ext cx="1227582" cy="365760"/>
-          </a:xfrm>
-          <a:prstGeom prst="rect">
-            <a:avLst/>
-          </a:prstGeom>
-          <a:noFill/>
-          <a:ln/>
-        </p:spPr>
-        <p:txBody>
-          <a:bodyPr wrap="square" lIns="0" tIns="0" rIns="0" bIns="0" rtlCol="0" anchor="ctr"/>
-          <a:lstStyle/>
-          <a:p>
-            <a:pPr indent="0" marL="0">
-              <a:buNone/>
-            </a:pPr>
-            <a:r>
-              <a:rPr lang="en-US" sz="1400" b="1" dirty="0">
-                <a:solidFill>
-                  <a:schemeClr val="tx1"/>
-                </a:solidFill>
-              </a:rPr>
-              <a:t>Set a target</a:t>
-            </a:r>
-            <a:endParaRPr lang="en-US" sz="1400" dirty="0"/>
-          </a:p>
-        </p:txBody>
-      </p:sp>
-      <p:sp>
-        <p:nvSpPr>
-          <p:cNvPr id="24" name="text-198"/>
-          <p:cNvSpPr txBox="1"/>
-          <p:nvPr/>
-        </p:nvSpPr>
-        <p:spPr>
-          <a:xfrm>
-            <a:off x="6938010" y="1709928"/>
-            <a:ext cx="1611630" cy="804672"/>
-          </a:xfrm>
-          <a:prstGeom prst="rect">
-            <a:avLst/>
-          </a:prstGeom>
-          <a:noFill/>
-          <a:ln/>
-        </p:spPr>
-        <p:txBody>
-          <a:bodyPr wrap="square" lIns="0" tIns="0" rIns="0" bIns="0" rtlCol="0" anchor="t"/>
-          <a:lstStyle/>
-          <a:p>
-            <a:pPr indent="0" marL="0">
-              <a:buNone/>
-            </a:pPr>
-            <a:r>
-              <a:rPr lang="en-US" sz="1150" dirty="0">
-                <a:solidFill>
-                  <a:srgbClr val="55666E"/>
-                </a:solidFill>
-              </a:rPr>
-              <a:t>Calm: EMA10 vs EMA30 trend at a 0.6% vol target. Crisis: short below SMA30 (max 0.5), else flat.</a:t>
-            </a:r>
-            <a:endParaRPr lang="en-US" sz="1150" dirty="0"/>
-          </a:p>
-        </p:txBody>
-      </p:sp>
-      <p:sp>
-        <p:nvSpPr>
-          <p:cNvPr id="25" name="card-199"/>
-          <p:cNvSpPr/>
-          <p:nvPr/>
-        </p:nvSpPr>
-        <p:spPr>
-          <a:xfrm>
-            <a:off x="457200" y="2834640"/>
-            <a:ext cx="1885950" cy="1463040"/>
-          </a:xfrm>
-          <a:prstGeom prst="roundRect">
-            <a:avLst>
-              <a:gd name="adj" fmla="val 5000"/>
-            </a:avLst>
-          </a:prstGeom>
-          <a:solidFill>
-            <a:schemeClr val="bg2"/>
-          </a:solidFill>
-          <a:ln w="12700">
-            <a:solidFill>
-              <a:schemeClr val="bg2"/>
-            </a:solidFill>
-            <a:prstDash val="solid"/>
-          </a:ln>
-        </p:spPr>
-      </p:sp>
-      <p:sp>
-        <p:nvSpPr>
-          <p:cNvPr id="26" name="step-dot-200"/>
-          <p:cNvSpPr/>
-          <p:nvPr/>
-        </p:nvSpPr>
-        <p:spPr>
-          <a:xfrm>
-            <a:off x="594360" y="2971800"/>
-            <a:ext cx="329184" cy="329184"/>
-          </a:xfrm>
-          <a:prstGeom prst="ellipse">
-            <a:avLst/>
-          </a:prstGeom>
-          <a:solidFill>
-            <a:schemeClr val="accent1"/>
-          </a:solidFill>
-          <a:ln w="12700">
-            <a:solidFill>
-              <a:schemeClr val="accent1"/>
-            </a:solidFill>
-            <a:prstDash val="solid"/>
-          </a:ln>
-        </p:spPr>
-      </p:sp>
-      <p:sp>
-        <p:nvSpPr>
-          <p:cNvPr id="27" name="text-201"/>
-          <p:cNvSpPr txBox="1"/>
-          <p:nvPr/>
-        </p:nvSpPr>
-        <p:spPr>
-          <a:xfrm>
-            <a:off x="594360" y="2971800"/>
-            <a:ext cx="329184" cy="329184"/>
-          </a:xfrm>
-          <a:prstGeom prst="rect">
-            <a:avLst/>
-          </a:prstGeom>
-          <a:noFill/>
-          <a:ln/>
-        </p:spPr>
-        <p:txBody>
-          <a:bodyPr wrap="square" lIns="0" tIns="0" rIns="0" bIns="0" rtlCol="0" anchor="ctr"/>
-          <a:lstStyle/>
-          <a:p>
-            <a:pPr algn="ctr" indent="0" marL="0">
-              <a:buNone/>
-            </a:pPr>
-            <a:r>
-              <a:rPr lang="en-US" sz="1300" b="1" dirty="0">
-                <a:solidFill>
-                  <a:schemeClr val="bg1"/>
-                </a:solidFill>
-              </a:rPr>
-              <a:t>5</a:t>
-            </a:r>
-            <a:endParaRPr lang="en-US" sz="1300" dirty="0"/>
-          </a:p>
-        </p:txBody>
-      </p:sp>
-      <p:sp>
-        <p:nvSpPr>
-          <p:cNvPr id="28" name="text-202"/>
-          <p:cNvSpPr txBox="1"/>
-          <p:nvPr/>
-        </p:nvSpPr>
-        <p:spPr>
-          <a:xfrm>
-            <a:off x="1005840" y="2953512"/>
-            <a:ext cx="1227582" cy="365760"/>
-          </a:xfrm>
-          <a:prstGeom prst="rect">
-            <a:avLst/>
-          </a:prstGeom>
-          <a:noFill/>
-          <a:ln/>
-        </p:spPr>
-        <p:txBody>
-          <a:bodyPr wrap="square" lIns="0" tIns="0" rIns="0" bIns="0" rtlCol="0" anchor="ctr"/>
-          <a:lstStyle/>
-          <a:p>
-            <a:pPr indent="0" marL="0">
-              <a:buNone/>
-            </a:pPr>
-            <a:r>
-              <a:rPr lang="en-US" sz="1400" b="1" dirty="0">
-                <a:solidFill>
-                  <a:schemeClr val="tx1"/>
-                </a:solidFill>
-              </a:rPr>
-              <a:t>Lag one bar</a:t>
-            </a:r>
-            <a:endParaRPr lang="en-US" sz="1400" dirty="0"/>
-          </a:p>
-        </p:txBody>
-      </p:sp>
-      <p:sp>
-        <p:nvSpPr>
-          <p:cNvPr id="29" name="text-203"/>
-          <p:cNvSpPr txBox="1"/>
-          <p:nvPr/>
-        </p:nvSpPr>
-        <p:spPr>
-          <a:xfrm>
-            <a:off x="594360" y="3401568"/>
-            <a:ext cx="1611630" cy="804672"/>
-          </a:xfrm>
-          <a:prstGeom prst="rect">
-            <a:avLst/>
-          </a:prstGeom>
-          <a:noFill/>
-          <a:ln/>
-        </p:spPr>
-        <p:txBody>
-          <a:bodyPr wrap="square" lIns="0" tIns="0" rIns="0" bIns="0" rtlCol="0" anchor="t"/>
-          <a:lstStyle/>
-          <a:p>
-            <a:pPr indent="0" marL="0">
-              <a:buNone/>
-            </a:pPr>
-            <a:r>
-              <a:rPr lang="en-US" sz="1150" dirty="0">
-                <a:solidFill>
-                  <a:srgbClr val="55666E"/>
-                </a:solidFill>
-              </a:rPr>
-              <a:t>Computed at the close of t−1, held during bar t.</a:t>
-            </a:r>
-            <a:endParaRPr lang="en-US" sz="1150" dirty="0"/>
-          </a:p>
-        </p:txBody>
-      </p:sp>
-      <p:sp>
-        <p:nvSpPr>
-          <p:cNvPr id="30" name="card-204"/>
-          <p:cNvSpPr/>
-          <p:nvPr/>
-        </p:nvSpPr>
-        <p:spPr>
-          <a:xfrm>
-            <a:off x="2571750" y="2834640"/>
-            <a:ext cx="1885950" cy="1463040"/>
-          </a:xfrm>
-          <a:prstGeom prst="roundRect">
-            <a:avLst>
-              <a:gd name="adj" fmla="val 5000"/>
-            </a:avLst>
-          </a:prstGeom>
-          <a:solidFill>
-            <a:schemeClr val="bg2"/>
-          </a:solidFill>
-          <a:ln w="12700">
-            <a:solidFill>
-              <a:schemeClr val="bg2"/>
-            </a:solidFill>
-            <a:prstDash val="solid"/>
-          </a:ln>
-        </p:spPr>
-      </p:sp>
-      <p:sp>
-        <p:nvSpPr>
-          <p:cNvPr id="31" name="step-dot-205"/>
-          <p:cNvSpPr/>
-          <p:nvPr/>
-        </p:nvSpPr>
-        <p:spPr>
-          <a:xfrm>
-            <a:off x="2708910" y="2971800"/>
-            <a:ext cx="329184" cy="329184"/>
-          </a:xfrm>
-          <a:prstGeom prst="ellipse">
-            <a:avLst/>
-          </a:prstGeom>
-          <a:solidFill>
-            <a:schemeClr val="accent1"/>
-          </a:solidFill>
-          <a:ln w="12700">
-            <a:solidFill>
-              <a:schemeClr val="accent1"/>
-            </a:solidFill>
-            <a:prstDash val="solid"/>
-          </a:ln>
-        </p:spPr>
-      </p:sp>
-      <p:sp>
-        <p:nvSpPr>
-          <p:cNvPr id="32" name="text-206"/>
-          <p:cNvSpPr txBox="1"/>
-          <p:nvPr/>
-        </p:nvSpPr>
-        <p:spPr>
-          <a:xfrm>
-            <a:off x="2708910" y="2971800"/>
-            <a:ext cx="329184" cy="329184"/>
-          </a:xfrm>
-          <a:prstGeom prst="rect">
-            <a:avLst/>
-          </a:prstGeom>
-          <a:noFill/>
-          <a:ln/>
-        </p:spPr>
-        <p:txBody>
-          <a:bodyPr wrap="square" lIns="0" tIns="0" rIns="0" bIns="0" rtlCol="0" anchor="ctr"/>
-          <a:lstStyle/>
-          <a:p>
-            <a:pPr algn="ctr" indent="0" marL="0">
-              <a:buNone/>
-            </a:pPr>
-            <a:r>
-              <a:rPr lang="en-US" sz="1300" b="1" dirty="0">
-                <a:solidFill>
-                  <a:schemeClr val="bg1"/>
-                </a:solidFill>
-              </a:rPr>
-              <a:t>6</a:t>
-            </a:r>
-            <a:endParaRPr lang="en-US" sz="1300" dirty="0"/>
-          </a:p>
-        </p:txBody>
-      </p:sp>
-      <p:sp>
-        <p:nvSpPr>
-          <p:cNvPr id="33" name="text-207"/>
-          <p:cNvSpPr txBox="1"/>
-          <p:nvPr/>
-        </p:nvSpPr>
-        <p:spPr>
-          <a:xfrm>
-            <a:off x="3120390" y="2953512"/>
-            <a:ext cx="1227582" cy="365760"/>
-          </a:xfrm>
-          <a:prstGeom prst="rect">
-            <a:avLst/>
-          </a:prstGeom>
-          <a:noFill/>
-          <a:ln/>
-        </p:spPr>
-        <p:txBody>
-          <a:bodyPr wrap="square" lIns="0" tIns="0" rIns="0" bIns="0" rtlCol="0" anchor="ctr"/>
-          <a:lstStyle/>
-          <a:p>
-            <a:pPr indent="0" marL="0">
-              <a:buNone/>
-            </a:pPr>
-            <a:r>
-              <a:rPr lang="en-US" sz="1400" b="1" dirty="0">
-                <a:solidFill>
-                  <a:schemeClr val="tx1"/>
-                </a:solidFill>
-              </a:rPr>
-              <a:t>Smooth</a:t>
-            </a:r>
-            <a:endParaRPr lang="en-US" sz="1400" dirty="0"/>
-          </a:p>
-        </p:txBody>
-      </p:sp>
-      <p:sp>
-        <p:nvSpPr>
-          <p:cNvPr id="34" name="text-208"/>
-          <p:cNvSpPr txBox="1"/>
-          <p:nvPr/>
-        </p:nvSpPr>
-        <p:spPr>
-          <a:xfrm>
-            <a:off x="2708910" y="3401568"/>
-            <a:ext cx="1611630" cy="804672"/>
-          </a:xfrm>
-          <a:prstGeom prst="rect">
-            <a:avLst/>
-          </a:prstGeom>
-          <a:noFill/>
-          <a:ln/>
-        </p:spPr>
-        <p:txBody>
-          <a:bodyPr wrap="square" lIns="0" tIns="0" rIns="0" bIns="0" rtlCol="0" anchor="t"/>
-          <a:lstStyle/>
-          <a:p>
-            <a:pPr indent="0" marL="0">
-              <a:buNone/>
-            </a:pPr>
-            <a:r>
-              <a:rPr lang="en-US" sz="1150" dirty="0">
-                <a:solidFill>
-                  <a:srgbClr val="55666E"/>
-                </a:solidFill>
-              </a:rPr>
-              <a:t>Add risk at speed 0.3, cut or flip at 0.8. Saves cost, keeps fast exits.</a:t>
-            </a:r>
-            <a:endParaRPr lang="en-US" sz="1150" dirty="0"/>
-          </a:p>
-        </p:txBody>
-      </p:sp>
-      <p:sp>
-        <p:nvSpPr>
-          <p:cNvPr id="35" name="card-209"/>
-          <p:cNvSpPr/>
-          <p:nvPr/>
-        </p:nvSpPr>
-        <p:spPr>
-          <a:xfrm>
-            <a:off x="4686300" y="2834640"/>
-            <a:ext cx="1885950" cy="1463040"/>
-          </a:xfrm>
-          <a:prstGeom prst="roundRect">
-            <a:avLst>
-              <a:gd name="adj" fmla="val 5000"/>
-            </a:avLst>
-          </a:prstGeom>
-          <a:solidFill>
-            <a:schemeClr val="bg2"/>
-          </a:solidFill>
-          <a:ln w="12700">
-            <a:solidFill>
-              <a:schemeClr val="bg2"/>
-            </a:solidFill>
-            <a:prstDash val="solid"/>
-          </a:ln>
-        </p:spPr>
-      </p:sp>
-      <p:sp>
-        <p:nvSpPr>
-          <p:cNvPr id="36" name="step-dot-210"/>
-          <p:cNvSpPr/>
-          <p:nvPr/>
-        </p:nvSpPr>
-        <p:spPr>
-          <a:xfrm>
-            <a:off x="4823460" y="2971800"/>
-            <a:ext cx="329184" cy="329184"/>
-          </a:xfrm>
-          <a:prstGeom prst="ellipse">
-            <a:avLst/>
-          </a:prstGeom>
-          <a:solidFill>
-            <a:schemeClr val="accent1"/>
-          </a:solidFill>
-          <a:ln w="12700">
-            <a:solidFill>
-              <a:schemeClr val="accent1"/>
-            </a:solidFill>
-            <a:prstDash val="solid"/>
-          </a:ln>
-        </p:spPr>
-      </p:sp>
-      <p:sp>
-        <p:nvSpPr>
-          <p:cNvPr id="37" name="text-211"/>
-          <p:cNvSpPr txBox="1"/>
-          <p:nvPr/>
-        </p:nvSpPr>
-        <p:spPr>
-          <a:xfrm>
-            <a:off x="4823460" y="2971800"/>
-            <a:ext cx="329184" cy="329184"/>
-          </a:xfrm>
-          <a:prstGeom prst="rect">
-            <a:avLst/>
-          </a:prstGeom>
-          <a:noFill/>
-          <a:ln/>
-        </p:spPr>
-        <p:txBody>
-          <a:bodyPr wrap="square" lIns="0" tIns="0" rIns="0" bIns="0" rtlCol="0" anchor="ctr"/>
-          <a:lstStyle/>
-          <a:p>
-            <a:pPr algn="ctr" indent="0" marL="0">
-              <a:buNone/>
-            </a:pPr>
-            <a:r>
-              <a:rPr lang="en-US" sz="1300" b="1" dirty="0">
-                <a:solidFill>
-                  <a:schemeClr val="bg1"/>
-                </a:solidFill>
-              </a:rPr>
-              <a:t>7</a:t>
-            </a:r>
-            <a:endParaRPr lang="en-US" sz="1300" dirty="0"/>
-          </a:p>
-        </p:txBody>
-      </p:sp>
-      <p:sp>
-        <p:nvSpPr>
-          <p:cNvPr id="38" name="text-212"/>
-          <p:cNvSpPr txBox="1"/>
-          <p:nvPr/>
-        </p:nvSpPr>
-        <p:spPr>
-          <a:xfrm>
-            <a:off x="5234940" y="2953512"/>
-            <a:ext cx="1227582" cy="365760"/>
-          </a:xfrm>
-          <a:prstGeom prst="rect">
-            <a:avLst/>
-          </a:prstGeom>
-          <a:noFill/>
-          <a:ln/>
-        </p:spPr>
-        <p:txBody>
-          <a:bodyPr wrap="square" lIns="0" tIns="0" rIns="0" bIns="0" rtlCol="0" anchor="ctr"/>
-          <a:lstStyle/>
-          <a:p>
-            <a:pPr indent="0" marL="0">
-              <a:buNone/>
-            </a:pPr>
-            <a:r>
-              <a:rPr lang="en-US" sz="1400" b="1" dirty="0">
-                <a:solidFill>
-                  <a:schemeClr val="tx1"/>
-                </a:solidFill>
-              </a:rPr>
-              <a:t>Prove it</a:t>
-            </a:r>
-            <a:endParaRPr lang="en-US" sz="1400" dirty="0"/>
-          </a:p>
-        </p:txBody>
-      </p:sp>
-      <p:sp>
-        <p:nvSpPr>
-          <p:cNvPr id="39" name="text-213"/>
-          <p:cNvSpPr txBox="1"/>
-          <p:nvPr/>
-        </p:nvSpPr>
-        <p:spPr>
-          <a:xfrm>
-            <a:off x="4823460" y="3401568"/>
-            <a:ext cx="1611630" cy="804672"/>
-          </a:xfrm>
-          <a:prstGeom prst="rect">
-            <a:avLst/>
-          </a:prstGeom>
-          <a:noFill/>
-          <a:ln/>
-        </p:spPr>
-        <p:txBody>
-          <a:bodyPr wrap="square" lIns="0" tIns="0" rIns="0" bIns="0" rtlCol="0" anchor="t"/>
-          <a:lstStyle/>
-          <a:p>
-            <a:pPr indent="0" marL="0">
-              <a:buNone/>
-            </a:pPr>
-            <a:r>
-              <a:rPr lang="en-US" sz="1150" dirty="0">
-                <a:solidFill>
-                  <a:srgbClr val="55666E"/>
-                </a:solidFill>
-              </a:rPr>
-              <a:t>Rebuild all 50 signals with later rows deleted; must match exactly.</a:t>
-            </a:r>
-            <a:endParaRPr lang="en-US" sz="1150" dirty="0"/>
+            <a:endParaRPr lang="en-US" sz="1100" dirty="0"/>
           </a:p>
         </p:txBody>
       </p:sp>
@@ -22292,6 +22643,1270 @@
                   <a:schemeClr val="tx1"/>
                 </a:solidFill>
               </a:rPr>
+              <a:t>Round 3 engine, all seven steps</a:t>
+            </a:r>
+            <a:endParaRPr lang="en-US" sz="2800" dirty="0"/>
+          </a:p>
+        </p:txBody>
+      </p:sp>
+      <p:sp>
+        <p:nvSpPr>
+          <p:cNvPr id="3" name="kicker-180"/>
+          <p:cNvSpPr txBox="1"/>
+          <p:nvPr/>
+        </p:nvSpPr>
+        <p:spPr>
+          <a:xfrm>
+            <a:off x="457200" y="146304"/>
+            <a:ext cx="8229600" cy="237744"/>
+          </a:xfrm>
+          <a:prstGeom prst="rect">
+            <a:avLst/>
+          </a:prstGeom>
+          <a:noFill/>
+          <a:ln/>
+        </p:spPr>
+        <p:txBody>
+          <a:bodyPr wrap="square" lIns="0" tIns="0" rIns="0" bIns="0" rtlCol="0" anchor="t"/>
+          <a:lstStyle/>
+          <a:p>
+            <a:pPr indent="0" marL="0">
+              <a:buNone/>
+            </a:pPr>
+            <a:r>
+              <a:rPr lang="en-US" sz="1000" b="1" spc="200" kern="0" dirty="0">
+                <a:solidFill>
+                  <a:schemeClr val="accent2"/>
+                </a:solidFill>
+              </a:rPr>
+              <a:t>ROUND 3 · generate_round3_signals.py</a:t>
+            </a:r>
+            <a:endParaRPr lang="en-US" sz="1000" dirty="0"/>
+          </a:p>
+        </p:txBody>
+      </p:sp>
+      <p:sp>
+        <p:nvSpPr>
+          <p:cNvPr id="5" name="card-181"/>
+          <p:cNvSpPr/>
+          <p:nvPr/>
+        </p:nvSpPr>
+        <p:spPr>
+          <a:xfrm>
+            <a:off x="457200" y="1143000"/>
+            <a:ext cx="1885950" cy="1463040"/>
+          </a:xfrm>
+          <a:prstGeom prst="roundRect">
+            <a:avLst>
+              <a:gd name="adj" fmla="val 5000"/>
+            </a:avLst>
+          </a:prstGeom>
+          <a:solidFill>
+            <a:schemeClr val="bg2"/>
+          </a:solidFill>
+          <a:ln w="12700">
+            <a:solidFill>
+              <a:schemeClr val="bg2"/>
+            </a:solidFill>
+            <a:prstDash val="solid"/>
+          </a:ln>
+        </p:spPr>
+      </p:sp>
+      <p:sp>
+        <p:nvSpPr>
+          <p:cNvPr id="6" name="step-dot-182"/>
+          <p:cNvSpPr/>
+          <p:nvPr/>
+        </p:nvSpPr>
+        <p:spPr>
+          <a:xfrm>
+            <a:off x="594360" y="1280160"/>
+            <a:ext cx="329184" cy="329184"/>
+          </a:xfrm>
+          <a:prstGeom prst="ellipse">
+            <a:avLst/>
+          </a:prstGeom>
+          <a:solidFill>
+            <a:schemeClr val="accent1"/>
+          </a:solidFill>
+          <a:ln w="12700">
+            <a:solidFill>
+              <a:schemeClr val="accent1"/>
+            </a:solidFill>
+            <a:prstDash val="solid"/>
+          </a:ln>
+        </p:spPr>
+      </p:sp>
+      <p:sp>
+        <p:nvSpPr>
+          <p:cNvPr id="7" name="text-183"/>
+          <p:cNvSpPr txBox="1"/>
+          <p:nvPr/>
+        </p:nvSpPr>
+        <p:spPr>
+          <a:xfrm>
+            <a:off x="594360" y="1280160"/>
+            <a:ext cx="329184" cy="329184"/>
+          </a:xfrm>
+          <a:prstGeom prst="rect">
+            <a:avLst/>
+          </a:prstGeom>
+          <a:noFill/>
+          <a:ln/>
+        </p:spPr>
+        <p:txBody>
+          <a:bodyPr wrap="square" lIns="0" tIns="0" rIns="0" bIns="0" rtlCol="0" anchor="ctr"/>
+          <a:lstStyle/>
+          <a:p>
+            <a:pPr algn="ctr" indent="0" marL="0">
+              <a:buNone/>
+            </a:pPr>
+            <a:r>
+              <a:rPr lang="en-US" sz="1300" b="1" dirty="0">
+                <a:solidFill>
+                  <a:schemeClr val="bg1"/>
+                </a:solidFill>
+              </a:rPr>
+              <a:t>1</a:t>
+            </a:r>
+            <a:endParaRPr lang="en-US" sz="1300" dirty="0"/>
+          </a:p>
+        </p:txBody>
+      </p:sp>
+      <p:sp>
+        <p:nvSpPr>
+          <p:cNvPr id="8" name="text-184"/>
+          <p:cNvSpPr txBox="1"/>
+          <p:nvPr/>
+        </p:nvSpPr>
+        <p:spPr>
+          <a:xfrm>
+            <a:off x="1005840" y="1261872"/>
+            <a:ext cx="1227582" cy="365760"/>
+          </a:xfrm>
+          <a:prstGeom prst="rect">
+            <a:avLst/>
+          </a:prstGeom>
+          <a:noFill/>
+          <a:ln/>
+        </p:spPr>
+        <p:txBody>
+          <a:bodyPr wrap="square" lIns="0" tIns="0" rIns="0" bIns="0" rtlCol="0" anchor="ctr"/>
+          <a:lstStyle/>
+          <a:p>
+            <a:pPr indent="0" marL="0">
+              <a:buNone/>
+            </a:pPr>
+            <a:r>
+              <a:rPr lang="en-US" sz="1400" b="1" dirty="0">
+                <a:solidFill>
+                  <a:schemeClr val="tx1"/>
+                </a:solidFill>
+              </a:rPr>
+              <a:t>Recover closes</a:t>
+            </a:r>
+            <a:endParaRPr lang="en-US" sz="1400" dirty="0"/>
+          </a:p>
+        </p:txBody>
+      </p:sp>
+      <p:sp>
+        <p:nvSpPr>
+          <p:cNvPr id="9" name="text-185"/>
+          <p:cNvSpPr txBox="1"/>
+          <p:nvPr/>
+        </p:nvSpPr>
+        <p:spPr>
+          <a:xfrm>
+            <a:off x="594360" y="1709928"/>
+            <a:ext cx="1611630" cy="804672"/>
+          </a:xfrm>
+          <a:prstGeom prst="rect">
+            <a:avLst/>
+          </a:prstGeom>
+          <a:noFill/>
+          <a:ln/>
+        </p:spPr>
+        <p:txBody>
+          <a:bodyPr wrap="square" lIns="0" tIns="0" rIns="0" bIns="0" rtlCol="0" anchor="t"/>
+          <a:lstStyle/>
+          <a:p>
+            <a:pPr indent="0" marL="0">
+              <a:buNone/>
+            </a:pPr>
+            <a:r>
+              <a:rPr lang="en-US" sz="1150" dirty="0">
+                <a:solidFill>
+                  <a:srgbClr val="55666E"/>
+                </a:solidFill>
+              </a:rPr>
+              <a:t>Same order_flow identity. A bar's close is used only from the next bar on.</a:t>
+            </a:r>
+            <a:endParaRPr lang="en-US" sz="1150" dirty="0"/>
+          </a:p>
+        </p:txBody>
+      </p:sp>
+      <p:sp>
+        <p:nvSpPr>
+          <p:cNvPr id="10" name="card-186"/>
+          <p:cNvSpPr/>
+          <p:nvPr/>
+        </p:nvSpPr>
+        <p:spPr>
+          <a:xfrm>
+            <a:off x="2571750" y="1143000"/>
+            <a:ext cx="1885950" cy="1463040"/>
+          </a:xfrm>
+          <a:prstGeom prst="roundRect">
+            <a:avLst>
+              <a:gd name="adj" fmla="val 5000"/>
+            </a:avLst>
+          </a:prstGeom>
+          <a:solidFill>
+            <a:schemeClr val="bg2"/>
+          </a:solidFill>
+          <a:ln w="12700">
+            <a:solidFill>
+              <a:schemeClr val="bg2"/>
+            </a:solidFill>
+            <a:prstDash val="solid"/>
+          </a:ln>
+        </p:spPr>
+      </p:sp>
+      <p:sp>
+        <p:nvSpPr>
+          <p:cNvPr id="11" name="step-dot-187"/>
+          <p:cNvSpPr/>
+          <p:nvPr/>
+        </p:nvSpPr>
+        <p:spPr>
+          <a:xfrm>
+            <a:off x="2708910" y="1280160"/>
+            <a:ext cx="329184" cy="329184"/>
+          </a:xfrm>
+          <a:prstGeom prst="ellipse">
+            <a:avLst/>
+          </a:prstGeom>
+          <a:solidFill>
+            <a:schemeClr val="accent1"/>
+          </a:solidFill>
+          <a:ln w="12700">
+            <a:solidFill>
+              <a:schemeClr val="accent1"/>
+            </a:solidFill>
+            <a:prstDash val="solid"/>
+          </a:ln>
+        </p:spPr>
+      </p:sp>
+      <p:sp>
+        <p:nvSpPr>
+          <p:cNvPr id="12" name="text-188"/>
+          <p:cNvSpPr txBox="1"/>
+          <p:nvPr/>
+        </p:nvSpPr>
+        <p:spPr>
+          <a:xfrm>
+            <a:off x="2708910" y="1280160"/>
+            <a:ext cx="329184" cy="329184"/>
+          </a:xfrm>
+          <a:prstGeom prst="rect">
+            <a:avLst/>
+          </a:prstGeom>
+          <a:noFill/>
+          <a:ln/>
+        </p:spPr>
+        <p:txBody>
+          <a:bodyPr wrap="square" lIns="0" tIns="0" rIns="0" bIns="0" rtlCol="0" anchor="ctr"/>
+          <a:lstStyle/>
+          <a:p>
+            <a:pPr algn="ctr" indent="0" marL="0">
+              <a:buNone/>
+            </a:pPr>
+            <a:r>
+              <a:rPr lang="en-US" sz="1300" b="1" dirty="0">
+                <a:solidFill>
+                  <a:schemeClr val="bg1"/>
+                </a:solidFill>
+              </a:rPr>
+              <a:t>2</a:t>
+            </a:r>
+            <a:endParaRPr lang="en-US" sz="1300" dirty="0"/>
+          </a:p>
+        </p:txBody>
+      </p:sp>
+      <p:sp>
+        <p:nvSpPr>
+          <p:cNvPr id="13" name="text-189"/>
+          <p:cNvSpPr txBox="1"/>
+          <p:nvPr/>
+        </p:nvSpPr>
+        <p:spPr>
+          <a:xfrm>
+            <a:off x="3120390" y="1261872"/>
+            <a:ext cx="1227582" cy="365760"/>
+          </a:xfrm>
+          <a:prstGeom prst="rect">
+            <a:avLst/>
+          </a:prstGeom>
+          <a:noFill/>
+          <a:ln/>
+        </p:spPr>
+        <p:txBody>
+          <a:bodyPr wrap="square" lIns="0" tIns="0" rIns="0" bIns="0" rtlCol="0" anchor="ctr"/>
+          <a:lstStyle/>
+          <a:p>
+            <a:pPr indent="0" marL="0">
+              <a:buNone/>
+            </a:pPr>
+            <a:r>
+              <a:rPr lang="en-US" sz="1400" b="1" dirty="0">
+                <a:solidFill>
+                  <a:schemeClr val="tx1"/>
+                </a:solidFill>
+              </a:rPr>
+              <a:t>Measure risk</a:t>
+            </a:r>
+            <a:endParaRPr lang="en-US" sz="1400" dirty="0"/>
+          </a:p>
+        </p:txBody>
+      </p:sp>
+      <p:sp>
+        <p:nvSpPr>
+          <p:cNvPr id="14" name="text-190"/>
+          <p:cNvSpPr txBox="1"/>
+          <p:nvPr/>
+        </p:nvSpPr>
+        <p:spPr>
+          <a:xfrm>
+            <a:off x="2708910" y="1709928"/>
+            <a:ext cx="1611630" cy="804672"/>
+          </a:xfrm>
+          <a:prstGeom prst="rect">
+            <a:avLst/>
+          </a:prstGeom>
+          <a:noFill/>
+          <a:ln/>
+        </p:spPr>
+        <p:txBody>
+          <a:bodyPr wrap="square" lIns="0" tIns="0" rIns="0" bIns="0" rtlCol="0" anchor="t"/>
+          <a:lstStyle/>
+          <a:p>
+            <a:pPr indent="0" marL="0">
+              <a:buNone/>
+            </a:pPr>
+            <a:r>
+              <a:rPr lang="en-US" sz="1150" dirty="0">
+                <a:solidFill>
+                  <a:srgbClr val="55666E"/>
+                </a:solidFill>
+              </a:rPr>
+              <a:t>20- and 5-bar vol, 120-bar baseline vol, 60-bar drawdown, 30-bar mean.</a:t>
+            </a:r>
+            <a:endParaRPr lang="en-US" sz="1150" dirty="0"/>
+          </a:p>
+        </p:txBody>
+      </p:sp>
+      <p:sp>
+        <p:nvSpPr>
+          <p:cNvPr id="15" name="card-191"/>
+          <p:cNvSpPr/>
+          <p:nvPr/>
+        </p:nvSpPr>
+        <p:spPr>
+          <a:xfrm>
+            <a:off x="4686300" y="1143000"/>
+            <a:ext cx="1885950" cy="1463040"/>
+          </a:xfrm>
+          <a:prstGeom prst="roundRect">
+            <a:avLst>
+              <a:gd name="adj" fmla="val 5000"/>
+            </a:avLst>
+          </a:prstGeom>
+          <a:solidFill>
+            <a:schemeClr val="bg2"/>
+          </a:solidFill>
+          <a:ln w="12700">
+            <a:solidFill>
+              <a:schemeClr val="bg2"/>
+            </a:solidFill>
+            <a:prstDash val="solid"/>
+          </a:ln>
+        </p:spPr>
+      </p:sp>
+      <p:sp>
+        <p:nvSpPr>
+          <p:cNvPr id="16" name="step-dot-192"/>
+          <p:cNvSpPr/>
+          <p:nvPr/>
+        </p:nvSpPr>
+        <p:spPr>
+          <a:xfrm>
+            <a:off x="4823460" y="1280160"/>
+            <a:ext cx="329184" cy="329184"/>
+          </a:xfrm>
+          <a:prstGeom prst="ellipse">
+            <a:avLst/>
+          </a:prstGeom>
+          <a:solidFill>
+            <a:schemeClr val="accent1"/>
+          </a:solidFill>
+          <a:ln w="12700">
+            <a:solidFill>
+              <a:schemeClr val="accent1"/>
+            </a:solidFill>
+            <a:prstDash val="solid"/>
+          </a:ln>
+        </p:spPr>
+      </p:sp>
+      <p:sp>
+        <p:nvSpPr>
+          <p:cNvPr id="17" name="text-193"/>
+          <p:cNvSpPr txBox="1"/>
+          <p:nvPr/>
+        </p:nvSpPr>
+        <p:spPr>
+          <a:xfrm>
+            <a:off x="4823460" y="1280160"/>
+            <a:ext cx="329184" cy="329184"/>
+          </a:xfrm>
+          <a:prstGeom prst="rect">
+            <a:avLst/>
+          </a:prstGeom>
+          <a:noFill/>
+          <a:ln/>
+        </p:spPr>
+        <p:txBody>
+          <a:bodyPr wrap="square" lIns="0" tIns="0" rIns="0" bIns="0" rtlCol="0" anchor="ctr"/>
+          <a:lstStyle/>
+          <a:p>
+            <a:pPr algn="ctr" indent="0" marL="0">
+              <a:buNone/>
+            </a:pPr>
+            <a:r>
+              <a:rPr lang="en-US" sz="1300" b="1" dirty="0">
+                <a:solidFill>
+                  <a:schemeClr val="bg1"/>
+                </a:solidFill>
+              </a:rPr>
+              <a:t>3</a:t>
+            </a:r>
+            <a:endParaRPr lang="en-US" sz="1300" dirty="0"/>
+          </a:p>
+        </p:txBody>
+      </p:sp>
+      <p:sp>
+        <p:nvSpPr>
+          <p:cNvPr id="18" name="text-194"/>
+          <p:cNvSpPr txBox="1"/>
+          <p:nvPr/>
+        </p:nvSpPr>
+        <p:spPr>
+          <a:xfrm>
+            <a:off x="5234940" y="1261872"/>
+            <a:ext cx="1227582" cy="365760"/>
+          </a:xfrm>
+          <a:prstGeom prst="rect">
+            <a:avLst/>
+          </a:prstGeom>
+          <a:noFill/>
+          <a:ln/>
+        </p:spPr>
+        <p:txBody>
+          <a:bodyPr wrap="square" lIns="0" tIns="0" rIns="0" bIns="0" rtlCol="0" anchor="ctr"/>
+          <a:lstStyle/>
+          <a:p>
+            <a:pPr indent="0" marL="0">
+              <a:buNone/>
+            </a:pPr>
+            <a:r>
+              <a:rPr lang="en-US" sz="1400" b="1" dirty="0">
+                <a:solidFill>
+                  <a:schemeClr val="tx1"/>
+                </a:solidFill>
+              </a:rPr>
+              <a:t>Detect crisis</a:t>
+            </a:r>
+            <a:endParaRPr lang="en-US" sz="1400" dirty="0"/>
+          </a:p>
+        </p:txBody>
+      </p:sp>
+      <p:sp>
+        <p:nvSpPr>
+          <p:cNvPr id="19" name="text-195"/>
+          <p:cNvSpPr txBox="1"/>
+          <p:nvPr/>
+        </p:nvSpPr>
+        <p:spPr>
+          <a:xfrm>
+            <a:off x="4823460" y="1709928"/>
+            <a:ext cx="1611630" cy="804672"/>
+          </a:xfrm>
+          <a:prstGeom prst="rect">
+            <a:avLst/>
+          </a:prstGeom>
+          <a:noFill/>
+          <a:ln/>
+        </p:spPr>
+        <p:txBody>
+          <a:bodyPr wrap="square" lIns="0" tIns="0" rIns="0" bIns="0" rtlCol="0" anchor="t"/>
+          <a:lstStyle/>
+          <a:p>
+            <a:pPr indent="0" marL="0">
+              <a:buNone/>
+            </a:pPr>
+            <a:r>
+              <a:rPr lang="en-US" sz="1150" dirty="0">
+                <a:solidFill>
+                  <a:srgbClr val="55666E"/>
+                </a:solidFill>
+              </a:rPr>
+              <a:t>Vol spike &gt; 2.5× baseline, drawdown past −12%, or a 4× move. Hold 15 bars.</a:t>
+            </a:r>
+            <a:endParaRPr lang="en-US" sz="1150" dirty="0"/>
+          </a:p>
+        </p:txBody>
+      </p:sp>
+      <p:sp>
+        <p:nvSpPr>
+          <p:cNvPr id="20" name="card-196"/>
+          <p:cNvSpPr/>
+          <p:nvPr/>
+        </p:nvSpPr>
+        <p:spPr>
+          <a:xfrm>
+            <a:off x="6800850" y="1143000"/>
+            <a:ext cx="1885950" cy="1463040"/>
+          </a:xfrm>
+          <a:prstGeom prst="roundRect">
+            <a:avLst>
+              <a:gd name="adj" fmla="val 5000"/>
+            </a:avLst>
+          </a:prstGeom>
+          <a:solidFill>
+            <a:schemeClr val="bg2"/>
+          </a:solidFill>
+          <a:ln w="12700">
+            <a:solidFill>
+              <a:schemeClr val="bg2"/>
+            </a:solidFill>
+            <a:prstDash val="solid"/>
+          </a:ln>
+        </p:spPr>
+      </p:sp>
+      <p:sp>
+        <p:nvSpPr>
+          <p:cNvPr id="21" name="step-dot-197"/>
+          <p:cNvSpPr/>
+          <p:nvPr/>
+        </p:nvSpPr>
+        <p:spPr>
+          <a:xfrm>
+            <a:off x="6938010" y="1280160"/>
+            <a:ext cx="329184" cy="329184"/>
+          </a:xfrm>
+          <a:prstGeom prst="ellipse">
+            <a:avLst/>
+          </a:prstGeom>
+          <a:solidFill>
+            <a:schemeClr val="accent1"/>
+          </a:solidFill>
+          <a:ln w="12700">
+            <a:solidFill>
+              <a:schemeClr val="accent1"/>
+            </a:solidFill>
+            <a:prstDash val="solid"/>
+          </a:ln>
+        </p:spPr>
+      </p:sp>
+      <p:sp>
+        <p:nvSpPr>
+          <p:cNvPr id="22" name="text-198"/>
+          <p:cNvSpPr txBox="1"/>
+          <p:nvPr/>
+        </p:nvSpPr>
+        <p:spPr>
+          <a:xfrm>
+            <a:off x="6938010" y="1280160"/>
+            <a:ext cx="329184" cy="329184"/>
+          </a:xfrm>
+          <a:prstGeom prst="rect">
+            <a:avLst/>
+          </a:prstGeom>
+          <a:noFill/>
+          <a:ln/>
+        </p:spPr>
+        <p:txBody>
+          <a:bodyPr wrap="square" lIns="0" tIns="0" rIns="0" bIns="0" rtlCol="0" anchor="ctr"/>
+          <a:lstStyle/>
+          <a:p>
+            <a:pPr algn="ctr" indent="0" marL="0">
+              <a:buNone/>
+            </a:pPr>
+            <a:r>
+              <a:rPr lang="en-US" sz="1300" b="1" dirty="0">
+                <a:solidFill>
+                  <a:schemeClr val="bg1"/>
+                </a:solidFill>
+              </a:rPr>
+              <a:t>4</a:t>
+            </a:r>
+            <a:endParaRPr lang="en-US" sz="1300" dirty="0"/>
+          </a:p>
+        </p:txBody>
+      </p:sp>
+      <p:sp>
+        <p:nvSpPr>
+          <p:cNvPr id="23" name="text-199"/>
+          <p:cNvSpPr txBox="1"/>
+          <p:nvPr/>
+        </p:nvSpPr>
+        <p:spPr>
+          <a:xfrm>
+            <a:off x="7349490" y="1261872"/>
+            <a:ext cx="1227582" cy="365760"/>
+          </a:xfrm>
+          <a:prstGeom prst="rect">
+            <a:avLst/>
+          </a:prstGeom>
+          <a:noFill/>
+          <a:ln/>
+        </p:spPr>
+        <p:txBody>
+          <a:bodyPr wrap="square" lIns="0" tIns="0" rIns="0" bIns="0" rtlCol="0" anchor="ctr"/>
+          <a:lstStyle/>
+          <a:p>
+            <a:pPr indent="0" marL="0">
+              <a:buNone/>
+            </a:pPr>
+            <a:r>
+              <a:rPr lang="en-US" sz="1400" b="1" dirty="0">
+                <a:solidFill>
+                  <a:schemeClr val="tx1"/>
+                </a:solidFill>
+              </a:rPr>
+              <a:t>Set a target</a:t>
+            </a:r>
+            <a:endParaRPr lang="en-US" sz="1400" dirty="0"/>
+          </a:p>
+        </p:txBody>
+      </p:sp>
+      <p:sp>
+        <p:nvSpPr>
+          <p:cNvPr id="24" name="text-200"/>
+          <p:cNvSpPr txBox="1"/>
+          <p:nvPr/>
+        </p:nvSpPr>
+        <p:spPr>
+          <a:xfrm>
+            <a:off x="6938010" y="1709928"/>
+            <a:ext cx="1611630" cy="804672"/>
+          </a:xfrm>
+          <a:prstGeom prst="rect">
+            <a:avLst/>
+          </a:prstGeom>
+          <a:noFill/>
+          <a:ln/>
+        </p:spPr>
+        <p:txBody>
+          <a:bodyPr wrap="square" lIns="0" tIns="0" rIns="0" bIns="0" rtlCol="0" anchor="t"/>
+          <a:lstStyle/>
+          <a:p>
+            <a:pPr indent="0" marL="0">
+              <a:buNone/>
+            </a:pPr>
+            <a:r>
+              <a:rPr lang="en-US" sz="1150" dirty="0">
+                <a:solidFill>
+                  <a:srgbClr val="55666E"/>
+                </a:solidFill>
+              </a:rPr>
+              <a:t>Calm: EMA10 vs EMA30 trend at a 0.6% vol target. Crisis: short below SMA30 (max 0.5), else flat.</a:t>
+            </a:r>
+            <a:endParaRPr lang="en-US" sz="1150" dirty="0"/>
+          </a:p>
+        </p:txBody>
+      </p:sp>
+      <p:sp>
+        <p:nvSpPr>
+          <p:cNvPr id="25" name="card-201"/>
+          <p:cNvSpPr/>
+          <p:nvPr/>
+        </p:nvSpPr>
+        <p:spPr>
+          <a:xfrm>
+            <a:off x="457200" y="2834640"/>
+            <a:ext cx="1885950" cy="1463040"/>
+          </a:xfrm>
+          <a:prstGeom prst="roundRect">
+            <a:avLst>
+              <a:gd name="adj" fmla="val 5000"/>
+            </a:avLst>
+          </a:prstGeom>
+          <a:solidFill>
+            <a:schemeClr val="bg2"/>
+          </a:solidFill>
+          <a:ln w="12700">
+            <a:solidFill>
+              <a:schemeClr val="bg2"/>
+            </a:solidFill>
+            <a:prstDash val="solid"/>
+          </a:ln>
+        </p:spPr>
+      </p:sp>
+      <p:sp>
+        <p:nvSpPr>
+          <p:cNvPr id="26" name="step-dot-202"/>
+          <p:cNvSpPr/>
+          <p:nvPr/>
+        </p:nvSpPr>
+        <p:spPr>
+          <a:xfrm>
+            <a:off x="594360" y="2971800"/>
+            <a:ext cx="329184" cy="329184"/>
+          </a:xfrm>
+          <a:prstGeom prst="ellipse">
+            <a:avLst/>
+          </a:prstGeom>
+          <a:solidFill>
+            <a:schemeClr val="accent1"/>
+          </a:solidFill>
+          <a:ln w="12700">
+            <a:solidFill>
+              <a:schemeClr val="accent1"/>
+            </a:solidFill>
+            <a:prstDash val="solid"/>
+          </a:ln>
+        </p:spPr>
+      </p:sp>
+      <p:sp>
+        <p:nvSpPr>
+          <p:cNvPr id="27" name="text-203"/>
+          <p:cNvSpPr txBox="1"/>
+          <p:nvPr/>
+        </p:nvSpPr>
+        <p:spPr>
+          <a:xfrm>
+            <a:off x="594360" y="2971800"/>
+            <a:ext cx="329184" cy="329184"/>
+          </a:xfrm>
+          <a:prstGeom prst="rect">
+            <a:avLst/>
+          </a:prstGeom>
+          <a:noFill/>
+          <a:ln/>
+        </p:spPr>
+        <p:txBody>
+          <a:bodyPr wrap="square" lIns="0" tIns="0" rIns="0" bIns="0" rtlCol="0" anchor="ctr"/>
+          <a:lstStyle/>
+          <a:p>
+            <a:pPr algn="ctr" indent="0" marL="0">
+              <a:buNone/>
+            </a:pPr>
+            <a:r>
+              <a:rPr lang="en-US" sz="1300" b="1" dirty="0">
+                <a:solidFill>
+                  <a:schemeClr val="bg1"/>
+                </a:solidFill>
+              </a:rPr>
+              <a:t>5</a:t>
+            </a:r>
+            <a:endParaRPr lang="en-US" sz="1300" dirty="0"/>
+          </a:p>
+        </p:txBody>
+      </p:sp>
+      <p:sp>
+        <p:nvSpPr>
+          <p:cNvPr id="28" name="text-204"/>
+          <p:cNvSpPr txBox="1"/>
+          <p:nvPr/>
+        </p:nvSpPr>
+        <p:spPr>
+          <a:xfrm>
+            <a:off x="1005840" y="2953512"/>
+            <a:ext cx="1227582" cy="365760"/>
+          </a:xfrm>
+          <a:prstGeom prst="rect">
+            <a:avLst/>
+          </a:prstGeom>
+          <a:noFill/>
+          <a:ln/>
+        </p:spPr>
+        <p:txBody>
+          <a:bodyPr wrap="square" lIns="0" tIns="0" rIns="0" bIns="0" rtlCol="0" anchor="ctr"/>
+          <a:lstStyle/>
+          <a:p>
+            <a:pPr indent="0" marL="0">
+              <a:buNone/>
+            </a:pPr>
+            <a:r>
+              <a:rPr lang="en-US" sz="1400" b="1" dirty="0">
+                <a:solidFill>
+                  <a:schemeClr val="tx1"/>
+                </a:solidFill>
+              </a:rPr>
+              <a:t>Lag one bar</a:t>
+            </a:r>
+            <a:endParaRPr lang="en-US" sz="1400" dirty="0"/>
+          </a:p>
+        </p:txBody>
+      </p:sp>
+      <p:sp>
+        <p:nvSpPr>
+          <p:cNvPr id="29" name="text-205"/>
+          <p:cNvSpPr txBox="1"/>
+          <p:nvPr/>
+        </p:nvSpPr>
+        <p:spPr>
+          <a:xfrm>
+            <a:off x="594360" y="3401568"/>
+            <a:ext cx="1611630" cy="804672"/>
+          </a:xfrm>
+          <a:prstGeom prst="rect">
+            <a:avLst/>
+          </a:prstGeom>
+          <a:noFill/>
+          <a:ln/>
+        </p:spPr>
+        <p:txBody>
+          <a:bodyPr wrap="square" lIns="0" tIns="0" rIns="0" bIns="0" rtlCol="0" anchor="t"/>
+          <a:lstStyle/>
+          <a:p>
+            <a:pPr indent="0" marL="0">
+              <a:buNone/>
+            </a:pPr>
+            <a:r>
+              <a:rPr lang="en-US" sz="1150" dirty="0">
+                <a:solidFill>
+                  <a:srgbClr val="55666E"/>
+                </a:solidFill>
+              </a:rPr>
+              <a:t>Computed at the close of t−1, held during bar t.</a:t>
+            </a:r>
+            <a:endParaRPr lang="en-US" sz="1150" dirty="0"/>
+          </a:p>
+        </p:txBody>
+      </p:sp>
+      <p:sp>
+        <p:nvSpPr>
+          <p:cNvPr id="30" name="card-206"/>
+          <p:cNvSpPr/>
+          <p:nvPr/>
+        </p:nvSpPr>
+        <p:spPr>
+          <a:xfrm>
+            <a:off x="2571750" y="2834640"/>
+            <a:ext cx="1885950" cy="1463040"/>
+          </a:xfrm>
+          <a:prstGeom prst="roundRect">
+            <a:avLst>
+              <a:gd name="adj" fmla="val 5000"/>
+            </a:avLst>
+          </a:prstGeom>
+          <a:solidFill>
+            <a:schemeClr val="bg2"/>
+          </a:solidFill>
+          <a:ln w="12700">
+            <a:solidFill>
+              <a:schemeClr val="bg2"/>
+            </a:solidFill>
+            <a:prstDash val="solid"/>
+          </a:ln>
+        </p:spPr>
+      </p:sp>
+      <p:sp>
+        <p:nvSpPr>
+          <p:cNvPr id="31" name="step-dot-207"/>
+          <p:cNvSpPr/>
+          <p:nvPr/>
+        </p:nvSpPr>
+        <p:spPr>
+          <a:xfrm>
+            <a:off x="2708910" y="2971800"/>
+            <a:ext cx="329184" cy="329184"/>
+          </a:xfrm>
+          <a:prstGeom prst="ellipse">
+            <a:avLst/>
+          </a:prstGeom>
+          <a:solidFill>
+            <a:schemeClr val="accent1"/>
+          </a:solidFill>
+          <a:ln w="12700">
+            <a:solidFill>
+              <a:schemeClr val="accent1"/>
+            </a:solidFill>
+            <a:prstDash val="solid"/>
+          </a:ln>
+        </p:spPr>
+      </p:sp>
+      <p:sp>
+        <p:nvSpPr>
+          <p:cNvPr id="32" name="text-208"/>
+          <p:cNvSpPr txBox="1"/>
+          <p:nvPr/>
+        </p:nvSpPr>
+        <p:spPr>
+          <a:xfrm>
+            <a:off x="2708910" y="2971800"/>
+            <a:ext cx="329184" cy="329184"/>
+          </a:xfrm>
+          <a:prstGeom prst="rect">
+            <a:avLst/>
+          </a:prstGeom>
+          <a:noFill/>
+          <a:ln/>
+        </p:spPr>
+        <p:txBody>
+          <a:bodyPr wrap="square" lIns="0" tIns="0" rIns="0" bIns="0" rtlCol="0" anchor="ctr"/>
+          <a:lstStyle/>
+          <a:p>
+            <a:pPr algn="ctr" indent="0" marL="0">
+              <a:buNone/>
+            </a:pPr>
+            <a:r>
+              <a:rPr lang="en-US" sz="1300" b="1" dirty="0">
+                <a:solidFill>
+                  <a:schemeClr val="bg1"/>
+                </a:solidFill>
+              </a:rPr>
+              <a:t>6</a:t>
+            </a:r>
+            <a:endParaRPr lang="en-US" sz="1300" dirty="0"/>
+          </a:p>
+        </p:txBody>
+      </p:sp>
+      <p:sp>
+        <p:nvSpPr>
+          <p:cNvPr id="33" name="text-209"/>
+          <p:cNvSpPr txBox="1"/>
+          <p:nvPr/>
+        </p:nvSpPr>
+        <p:spPr>
+          <a:xfrm>
+            <a:off x="3120390" y="2953512"/>
+            <a:ext cx="1227582" cy="365760"/>
+          </a:xfrm>
+          <a:prstGeom prst="rect">
+            <a:avLst/>
+          </a:prstGeom>
+          <a:noFill/>
+          <a:ln/>
+        </p:spPr>
+        <p:txBody>
+          <a:bodyPr wrap="square" lIns="0" tIns="0" rIns="0" bIns="0" rtlCol="0" anchor="ctr"/>
+          <a:lstStyle/>
+          <a:p>
+            <a:pPr indent="0" marL="0">
+              <a:buNone/>
+            </a:pPr>
+            <a:r>
+              <a:rPr lang="en-US" sz="1400" b="1" dirty="0">
+                <a:solidFill>
+                  <a:schemeClr val="tx1"/>
+                </a:solidFill>
+              </a:rPr>
+              <a:t>Smooth</a:t>
+            </a:r>
+            <a:endParaRPr lang="en-US" sz="1400" dirty="0"/>
+          </a:p>
+        </p:txBody>
+      </p:sp>
+      <p:sp>
+        <p:nvSpPr>
+          <p:cNvPr id="34" name="text-210"/>
+          <p:cNvSpPr txBox="1"/>
+          <p:nvPr/>
+        </p:nvSpPr>
+        <p:spPr>
+          <a:xfrm>
+            <a:off x="2708910" y="3401568"/>
+            <a:ext cx="1611630" cy="804672"/>
+          </a:xfrm>
+          <a:prstGeom prst="rect">
+            <a:avLst/>
+          </a:prstGeom>
+          <a:noFill/>
+          <a:ln/>
+        </p:spPr>
+        <p:txBody>
+          <a:bodyPr wrap="square" lIns="0" tIns="0" rIns="0" bIns="0" rtlCol="0" anchor="t"/>
+          <a:lstStyle/>
+          <a:p>
+            <a:pPr indent="0" marL="0">
+              <a:buNone/>
+            </a:pPr>
+            <a:r>
+              <a:rPr lang="en-US" sz="1150" dirty="0">
+                <a:solidFill>
+                  <a:srgbClr val="55666E"/>
+                </a:solidFill>
+              </a:rPr>
+              <a:t>Add risk at speed 0.3, cut or flip at 0.8. Saves cost, keeps fast exits.</a:t>
+            </a:r>
+            <a:endParaRPr lang="en-US" sz="1150" dirty="0"/>
+          </a:p>
+        </p:txBody>
+      </p:sp>
+      <p:sp>
+        <p:nvSpPr>
+          <p:cNvPr id="35" name="card-211"/>
+          <p:cNvSpPr/>
+          <p:nvPr/>
+        </p:nvSpPr>
+        <p:spPr>
+          <a:xfrm>
+            <a:off x="4686300" y="2834640"/>
+            <a:ext cx="1885950" cy="1463040"/>
+          </a:xfrm>
+          <a:prstGeom prst="roundRect">
+            <a:avLst>
+              <a:gd name="adj" fmla="val 5000"/>
+            </a:avLst>
+          </a:prstGeom>
+          <a:solidFill>
+            <a:schemeClr val="bg2"/>
+          </a:solidFill>
+          <a:ln w="12700">
+            <a:solidFill>
+              <a:schemeClr val="bg2"/>
+            </a:solidFill>
+            <a:prstDash val="solid"/>
+          </a:ln>
+        </p:spPr>
+      </p:sp>
+      <p:sp>
+        <p:nvSpPr>
+          <p:cNvPr id="36" name="step-dot-212"/>
+          <p:cNvSpPr/>
+          <p:nvPr/>
+        </p:nvSpPr>
+        <p:spPr>
+          <a:xfrm>
+            <a:off x="4823460" y="2971800"/>
+            <a:ext cx="329184" cy="329184"/>
+          </a:xfrm>
+          <a:prstGeom prst="ellipse">
+            <a:avLst/>
+          </a:prstGeom>
+          <a:solidFill>
+            <a:schemeClr val="accent1"/>
+          </a:solidFill>
+          <a:ln w="12700">
+            <a:solidFill>
+              <a:schemeClr val="accent1"/>
+            </a:solidFill>
+            <a:prstDash val="solid"/>
+          </a:ln>
+        </p:spPr>
+      </p:sp>
+      <p:sp>
+        <p:nvSpPr>
+          <p:cNvPr id="37" name="text-213"/>
+          <p:cNvSpPr txBox="1"/>
+          <p:nvPr/>
+        </p:nvSpPr>
+        <p:spPr>
+          <a:xfrm>
+            <a:off x="4823460" y="2971800"/>
+            <a:ext cx="329184" cy="329184"/>
+          </a:xfrm>
+          <a:prstGeom prst="rect">
+            <a:avLst/>
+          </a:prstGeom>
+          <a:noFill/>
+          <a:ln/>
+        </p:spPr>
+        <p:txBody>
+          <a:bodyPr wrap="square" lIns="0" tIns="0" rIns="0" bIns="0" rtlCol="0" anchor="ctr"/>
+          <a:lstStyle/>
+          <a:p>
+            <a:pPr algn="ctr" indent="0" marL="0">
+              <a:buNone/>
+            </a:pPr>
+            <a:r>
+              <a:rPr lang="en-US" sz="1300" b="1" dirty="0">
+                <a:solidFill>
+                  <a:schemeClr val="bg1"/>
+                </a:solidFill>
+              </a:rPr>
+              <a:t>7</a:t>
+            </a:r>
+            <a:endParaRPr lang="en-US" sz="1300" dirty="0"/>
+          </a:p>
+        </p:txBody>
+      </p:sp>
+      <p:sp>
+        <p:nvSpPr>
+          <p:cNvPr id="38" name="text-214"/>
+          <p:cNvSpPr txBox="1"/>
+          <p:nvPr/>
+        </p:nvSpPr>
+        <p:spPr>
+          <a:xfrm>
+            <a:off x="5234940" y="2953512"/>
+            <a:ext cx="1227582" cy="365760"/>
+          </a:xfrm>
+          <a:prstGeom prst="rect">
+            <a:avLst/>
+          </a:prstGeom>
+          <a:noFill/>
+          <a:ln/>
+        </p:spPr>
+        <p:txBody>
+          <a:bodyPr wrap="square" lIns="0" tIns="0" rIns="0" bIns="0" rtlCol="0" anchor="ctr"/>
+          <a:lstStyle/>
+          <a:p>
+            <a:pPr indent="0" marL="0">
+              <a:buNone/>
+            </a:pPr>
+            <a:r>
+              <a:rPr lang="en-US" sz="1400" b="1" dirty="0">
+                <a:solidFill>
+                  <a:schemeClr val="tx1"/>
+                </a:solidFill>
+              </a:rPr>
+              <a:t>Prove it</a:t>
+            </a:r>
+            <a:endParaRPr lang="en-US" sz="1400" dirty="0"/>
+          </a:p>
+        </p:txBody>
+      </p:sp>
+      <p:sp>
+        <p:nvSpPr>
+          <p:cNvPr id="39" name="text-215"/>
+          <p:cNvSpPr txBox="1"/>
+          <p:nvPr/>
+        </p:nvSpPr>
+        <p:spPr>
+          <a:xfrm>
+            <a:off x="4823460" y="3401568"/>
+            <a:ext cx="1611630" cy="804672"/>
+          </a:xfrm>
+          <a:prstGeom prst="rect">
+            <a:avLst/>
+          </a:prstGeom>
+          <a:noFill/>
+          <a:ln/>
+        </p:spPr>
+        <p:txBody>
+          <a:bodyPr wrap="square" lIns="0" tIns="0" rIns="0" bIns="0" rtlCol="0" anchor="t"/>
+          <a:lstStyle/>
+          <a:p>
+            <a:pPr indent="0" marL="0">
+              <a:buNone/>
+            </a:pPr>
+            <a:r>
+              <a:rPr lang="en-US" sz="1150" dirty="0">
+                <a:solidFill>
+                  <a:srgbClr val="55666E"/>
+                </a:solidFill>
+              </a:rPr>
+              <a:t>Rebuild all 50 signals with later rows deleted; must match exactly.</a:t>
+            </a:r>
+            <a:endParaRPr lang="en-US" sz="1150" dirty="0"/>
+          </a:p>
+        </p:txBody>
+      </p:sp>
+      <p:sp>
+        <p:nvSpPr>
+          <p:cNvPr id="25" name="Slide Number Placeholder 0"/>
+          <p:cNvSpPr>
+            <a:spLocks noGrp="1"/>
+          </p:cNvSpPr>
+          <p:nvPr>
+            <p:ph type="sldNum" sz="quarter" idx="4294967295"/>
+          </p:nvPr>
+        </p:nvSpPr>
+        <p:spPr>
+          <a:xfrm>
+            <a:off x="8229600" y="4773168"/>
+            <a:ext cx="457200" cy="256032"/>
+          </a:xfrm>
+          <a:prstGeom prst="rect">
+            <a:avLst/>
+          </a:prstGeom>
+          <a:extLst>
+            <a:ext uri="{C572A759-6A51-4108-AA02-DFA0A04FC94B}">
+              <ma14:wrappingTextBoxFlag xmlns:ma14="http://schemas.microsoft.com/office/mac/drawingml/2011/main" val="0"/>
+            </a:ext>
+          </a:extLst>
+        </p:spPr>
+        <p:txBody>
+          <a:bodyPr/>
+          <a:lstStyle>
+            <a:lvl1pPr>
+              <a:defRPr sz="900">
+                <a:solidFill>
+                  <a:srgbClr val="8A9A9C"/>
+                </a:solidFill>
+              </a:defRPr>
+            </a:lvl1pPr>
+          </a:lstStyle>
+          <a:p>
+            <a:pPr algn="r"/>
+            <a:fld id="{F7021451-1387-4CA6-816F-3879F97B5CBC}" type="slidenum">
+              <a:rPr b="0" lang="en-US"/>
+              <a:t>15</a:t>
+            </a:fld>
+            <a:endParaRPr lang="en-US"/>
+          </a:p>
+        </p:txBody>
+      </p:sp>
+    </p:spTree>
+  </p:cSld>
+  <p:clrMapOvr>
+    <a:masterClrMapping/>
+  </p:clrMapOvr>
+</p:sld>
+</file>
+
+<file path=ppt/slides/slide16.xml><?xml version="1.0" encoding="utf-8"?>
+<p:sld xmlns:a="http://schemas.openxmlformats.org/drawingml/2006/main" xmlns:r="http://schemas.openxmlformats.org/officeDocument/2006/relationships" xmlns:p="http://schemas.openxmlformats.org/presentationml/2006/main">
+  <p:cSld name="Slide 16">
+    <p:spTree>
+      <p:nvGrpSpPr>
+        <p:cNvPr id="1" name=""/>
+        <p:cNvGrpSpPr/>
+        <p:nvPr/>
+      </p:nvGrpSpPr>
+      <p:grpSpPr>
+        <a:xfrm>
+          <a:off x="0" y="0"/>
+          <a:ext cx="0" cy="0"/>
+          <a:chOff x="0" y="0"/>
+          <a:chExt cx="0" cy="0"/>
+        </a:xfrm>
+      </p:grpSpPr>
+      <p:sp>
+        <p:nvSpPr>
+          <p:cNvPr id="2" name="Text 0"/>
+          <p:cNvSpPr/>
+          <p:nvPr>
+            <p:ph idx="100" type="title" hasCustomPrompt="1"/>
+          </p:nvPr>
+        </p:nvSpPr>
+        <p:spPr>
+          <a:xfrm>
+            <a:off x="457200" y="384048"/>
+            <a:ext cx="8229600" cy="548640"/>
+          </a:xfrm>
+          <a:prstGeom prst="rect">
+            <a:avLst/>
+          </a:prstGeom>
+          <a:noFill/>
+          <a:ln/>
+        </p:spPr>
+        <p:txBody>
+          <a:bodyPr wrap="square" lIns="0" tIns="0" rIns="0" bIns="0" rtlCol="0" anchor="ctr"/>
+          <a:lstStyle/>
+          <a:p>
+            <a:pPr algn="l" indent="0" marL="0">
+              <a:buNone/>
+            </a:pPr>
+            <a:r>
+              <a:rPr lang="en-US" sz="2800" b="1" dirty="0">
+                <a:solidFill>
+                  <a:schemeClr val="tx1"/>
+                </a:solidFill>
+              </a:rPr>
               <a:t>ARBM: trade the breakout after a squeeze</a:t>
             </a:r>
             <a:endParaRPr lang="en-US" sz="2800" dirty="0"/>
@@ -22300,7 +23915,7 @@
       </p:sp>
       <p:sp>
         <p:nvSpPr>
-          <p:cNvPr id="3" name="kicker-214"/>
+          <p:cNvPr id="3" name="kicker-216"/>
           <p:cNvSpPr txBox="1"/>
           <p:nvPr/>
         </p:nvSpPr>
@@ -22336,7 +23951,7 @@
       </p:sp>
       <p:sp>
         <p:nvSpPr>
-          <p:cNvPr id="5" name="card-215"/>
+          <p:cNvPr id="5" name="card-217"/>
           <p:cNvSpPr/>
           <p:nvPr/>
         </p:nvSpPr>
@@ -22390,7 +24005,7 @@
       </p:sp>
       <p:sp>
         <p:nvSpPr>
-          <p:cNvPr id="7" name="text-216"/>
+          <p:cNvPr id="7" name="text-218"/>
           <p:cNvSpPr txBox="1"/>
           <p:nvPr/>
         </p:nvSpPr>
@@ -22426,7 +24041,7 @@
       </p:sp>
       <p:sp>
         <p:nvSpPr>
-          <p:cNvPr id="8" name="line-217"/>
+          <p:cNvPr id="8" name="line-219"/>
           <p:cNvSpPr/>
           <p:nvPr/>
         </p:nvSpPr>
@@ -22449,7 +24064,7 @@
       </p:sp>
       <p:sp>
         <p:nvSpPr>
-          <p:cNvPr id="9" name="line-218"/>
+          <p:cNvPr id="9" name="line-220"/>
           <p:cNvSpPr/>
           <p:nvPr/>
         </p:nvSpPr>
@@ -22472,7 +24087,7 @@
       </p:sp>
       <p:sp>
         <p:nvSpPr>
-          <p:cNvPr id="10" name="line-219"/>
+          <p:cNvPr id="10" name="line-221"/>
           <p:cNvSpPr/>
           <p:nvPr/>
         </p:nvSpPr>
@@ -22495,7 +24110,7 @@
       </p:sp>
       <p:sp>
         <p:nvSpPr>
-          <p:cNvPr id="11" name="line-220"/>
+          <p:cNvPr id="11" name="line-222"/>
           <p:cNvSpPr/>
           <p:nvPr/>
         </p:nvSpPr>
@@ -22518,7 +24133,7 @@
       </p:sp>
       <p:sp>
         <p:nvSpPr>
-          <p:cNvPr id="12" name="line-221"/>
+          <p:cNvPr id="12" name="line-223"/>
           <p:cNvSpPr/>
           <p:nvPr/>
         </p:nvSpPr>
@@ -22541,7 +24156,7 @@
       </p:sp>
       <p:sp>
         <p:nvSpPr>
-          <p:cNvPr id="13" name="line-222"/>
+          <p:cNvPr id="13" name="line-224"/>
           <p:cNvSpPr/>
           <p:nvPr/>
         </p:nvSpPr>
@@ -22564,7 +24179,7 @@
       </p:sp>
       <p:sp>
         <p:nvSpPr>
-          <p:cNvPr id="14" name="line-223"/>
+          <p:cNvPr id="14" name="line-225"/>
           <p:cNvSpPr/>
           <p:nvPr/>
         </p:nvSpPr>
@@ -22587,7 +24202,7 @@
       </p:sp>
       <p:sp>
         <p:nvSpPr>
-          <p:cNvPr id="15" name="line-224"/>
+          <p:cNvPr id="15" name="line-226"/>
           <p:cNvSpPr/>
           <p:nvPr/>
         </p:nvSpPr>
@@ -22610,7 +24225,7 @@
       </p:sp>
       <p:sp>
         <p:nvSpPr>
-          <p:cNvPr id="16" name="line-225"/>
+          <p:cNvPr id="16" name="line-227"/>
           <p:cNvSpPr/>
           <p:nvPr/>
         </p:nvSpPr>
@@ -22633,7 +24248,7 @@
       </p:sp>
       <p:sp>
         <p:nvSpPr>
-          <p:cNvPr id="17" name="line-226"/>
+          <p:cNvPr id="17" name="line-228"/>
           <p:cNvSpPr/>
           <p:nvPr/>
         </p:nvSpPr>
@@ -22656,7 +24271,7 @@
       </p:sp>
       <p:sp>
         <p:nvSpPr>
-          <p:cNvPr id="18" name="line-227"/>
+          <p:cNvPr id="18" name="line-229"/>
           <p:cNvSpPr/>
           <p:nvPr/>
         </p:nvSpPr>
@@ -22679,7 +24294,7 @@
       </p:sp>
       <p:sp>
         <p:nvSpPr>
-          <p:cNvPr id="19" name="line-228"/>
+          <p:cNvPr id="19" name="line-230"/>
           <p:cNvSpPr/>
           <p:nvPr/>
         </p:nvSpPr>
@@ -22702,7 +24317,7 @@
       </p:sp>
       <p:sp>
         <p:nvSpPr>
-          <p:cNvPr id="20" name="line-229"/>
+          <p:cNvPr id="20" name="line-231"/>
           <p:cNvSpPr/>
           <p:nvPr/>
         </p:nvSpPr>
@@ -22725,7 +24340,7 @@
       </p:sp>
       <p:sp>
         <p:nvSpPr>
-          <p:cNvPr id="21" name="line-230"/>
+          <p:cNvPr id="21" name="line-232"/>
           <p:cNvSpPr/>
           <p:nvPr/>
         </p:nvSpPr>
@@ -22748,7 +24363,7 @@
       </p:sp>
       <p:sp>
         <p:nvSpPr>
-          <p:cNvPr id="22" name="line-231"/>
+          <p:cNvPr id="22" name="line-233"/>
           <p:cNvSpPr/>
           <p:nvPr/>
         </p:nvSpPr>
@@ -22771,7 +24386,7 @@
       </p:sp>
       <p:sp>
         <p:nvSpPr>
-          <p:cNvPr id="23" name="line-232"/>
+          <p:cNvPr id="23" name="line-234"/>
           <p:cNvSpPr/>
           <p:nvPr/>
         </p:nvSpPr>
@@ -22794,7 +24409,7 @@
       </p:sp>
       <p:sp>
         <p:nvSpPr>
-          <p:cNvPr id="24" name="line-233"/>
+          <p:cNvPr id="24" name="line-235"/>
           <p:cNvSpPr/>
           <p:nvPr/>
         </p:nvSpPr>
@@ -22817,7 +24432,7 @@
       </p:sp>
       <p:sp>
         <p:nvSpPr>
-          <p:cNvPr id="25" name="line-234"/>
+          <p:cNvPr id="25" name="line-236"/>
           <p:cNvSpPr/>
           <p:nvPr/>
         </p:nvSpPr>
@@ -22840,7 +24455,7 @@
       </p:sp>
       <p:sp>
         <p:nvSpPr>
-          <p:cNvPr id="26" name="line-235"/>
+          <p:cNvPr id="26" name="line-237"/>
           <p:cNvSpPr/>
           <p:nvPr/>
         </p:nvSpPr>
@@ -22863,7 +24478,7 @@
       </p:sp>
       <p:sp>
         <p:nvSpPr>
-          <p:cNvPr id="27" name="line-236"/>
+          <p:cNvPr id="27" name="line-238"/>
           <p:cNvSpPr/>
           <p:nvPr/>
         </p:nvSpPr>
@@ -22886,7 +24501,7 @@
       </p:sp>
       <p:sp>
         <p:nvSpPr>
-          <p:cNvPr id="28" name="line-237"/>
+          <p:cNvPr id="28" name="line-239"/>
           <p:cNvSpPr/>
           <p:nvPr/>
         </p:nvSpPr>
@@ -22909,7 +24524,7 @@
       </p:sp>
       <p:sp>
         <p:nvSpPr>
-          <p:cNvPr id="29" name="line-238"/>
+          <p:cNvPr id="29" name="line-240"/>
           <p:cNvSpPr/>
           <p:nvPr/>
         </p:nvSpPr>
@@ -22932,7 +24547,7 @@
       </p:sp>
       <p:sp>
         <p:nvSpPr>
-          <p:cNvPr id="30" name="line-239"/>
+          <p:cNvPr id="30" name="line-241"/>
           <p:cNvSpPr/>
           <p:nvPr/>
         </p:nvSpPr>
@@ -22955,7 +24570,7 @@
       </p:sp>
       <p:sp>
         <p:nvSpPr>
-          <p:cNvPr id="31" name="line-240"/>
+          <p:cNvPr id="31" name="line-242"/>
           <p:cNvSpPr/>
           <p:nvPr/>
         </p:nvSpPr>
@@ -22978,7 +24593,7 @@
       </p:sp>
       <p:sp>
         <p:nvSpPr>
-          <p:cNvPr id="32" name="line-241"/>
+          <p:cNvPr id="32" name="line-243"/>
           <p:cNvSpPr/>
           <p:nvPr/>
         </p:nvSpPr>
@@ -23001,7 +24616,7 @@
       </p:sp>
       <p:sp>
         <p:nvSpPr>
-          <p:cNvPr id="33" name="line-242"/>
+          <p:cNvPr id="33" name="line-244"/>
           <p:cNvSpPr/>
           <p:nvPr/>
         </p:nvSpPr>
@@ -23024,7 +24639,7 @@
       </p:sp>
       <p:sp>
         <p:nvSpPr>
-          <p:cNvPr id="34" name="line-243"/>
+          <p:cNvPr id="34" name="line-245"/>
           <p:cNvSpPr/>
           <p:nvPr/>
         </p:nvSpPr>
@@ -23047,7 +24662,7 @@
       </p:sp>
       <p:sp>
         <p:nvSpPr>
-          <p:cNvPr id="35" name="line-244"/>
+          <p:cNvPr id="35" name="line-246"/>
           <p:cNvSpPr/>
           <p:nvPr/>
         </p:nvSpPr>
@@ -23070,7 +24685,7 @@
       </p:sp>
       <p:sp>
         <p:nvSpPr>
-          <p:cNvPr id="36" name="line-245"/>
+          <p:cNvPr id="36" name="line-247"/>
           <p:cNvSpPr/>
           <p:nvPr/>
         </p:nvSpPr>
@@ -23093,7 +24708,7 @@
       </p:sp>
       <p:sp>
         <p:nvSpPr>
-          <p:cNvPr id="37" name="line-246"/>
+          <p:cNvPr id="37" name="line-248"/>
           <p:cNvSpPr/>
           <p:nvPr/>
         </p:nvSpPr>
@@ -23116,7 +24731,7 @@
       </p:sp>
       <p:sp>
         <p:nvSpPr>
-          <p:cNvPr id="38" name="line-247"/>
+          <p:cNvPr id="38" name="line-249"/>
           <p:cNvSpPr/>
           <p:nvPr/>
         </p:nvSpPr>
@@ -23139,7 +24754,7 @@
       </p:sp>
       <p:sp>
         <p:nvSpPr>
-          <p:cNvPr id="39" name="line-248"/>
+          <p:cNvPr id="39" name="line-250"/>
           <p:cNvSpPr/>
           <p:nvPr/>
         </p:nvSpPr>
@@ -23162,7 +24777,7 @@
       </p:sp>
       <p:sp>
         <p:nvSpPr>
-          <p:cNvPr id="40" name="line-249"/>
+          <p:cNvPr id="40" name="line-251"/>
           <p:cNvSpPr/>
           <p:nvPr/>
         </p:nvSpPr>
@@ -23185,7 +24800,7 @@
       </p:sp>
       <p:sp>
         <p:nvSpPr>
-          <p:cNvPr id="41" name="text-250"/>
+          <p:cNvPr id="41" name="text-252"/>
           <p:cNvSpPr txBox="1"/>
           <p:nvPr/>
         </p:nvSpPr>
@@ -23221,7 +24836,7 @@
       </p:sp>
       <p:sp>
         <p:nvSpPr>
-          <p:cNvPr id="42" name="line-251"/>
+          <p:cNvPr id="42" name="line-253"/>
           <p:cNvSpPr/>
           <p:nvPr/>
         </p:nvSpPr>
@@ -23244,7 +24859,7 @@
       </p:sp>
       <p:sp>
         <p:nvSpPr>
-          <p:cNvPr id="43" name="text-252"/>
+          <p:cNvPr id="43" name="text-254"/>
           <p:cNvSpPr txBox="1"/>
           <p:nvPr/>
         </p:nvSpPr>
@@ -23280,7 +24895,7 @@
       </p:sp>
       <p:sp>
         <p:nvSpPr>
-          <p:cNvPr id="44" name="line-253"/>
+          <p:cNvPr id="44" name="line-255"/>
           <p:cNvSpPr/>
           <p:nvPr/>
         </p:nvSpPr>
@@ -23303,7 +24918,7 @@
       </p:sp>
       <p:sp>
         <p:nvSpPr>
-          <p:cNvPr id="45" name="text-254"/>
+          <p:cNvPr id="45" name="text-256"/>
           <p:cNvSpPr txBox="1"/>
           <p:nvPr/>
         </p:nvSpPr>
@@ -23339,7 +24954,7 @@
       </p:sp>
       <p:sp>
         <p:nvSpPr>
-          <p:cNvPr id="46" name="text-255"/>
+          <p:cNvPr id="46" name="text-257"/>
           <p:cNvSpPr txBox="1"/>
           <p:nvPr/>
         </p:nvSpPr>
@@ -23375,7 +24990,7 @@
       </p:sp>
       <p:sp>
         <p:nvSpPr>
-          <p:cNvPr id="47" name="text-256"/>
+          <p:cNvPr id="47" name="text-258"/>
           <p:cNvSpPr txBox="1"/>
           <p:nvPr/>
         </p:nvSpPr>
@@ -23411,7 +25026,7 @@
       </p:sp>
       <p:sp>
         <p:nvSpPr>
-          <p:cNvPr id="48" name="text-257"/>
+          <p:cNvPr id="48" name="text-259"/>
           <p:cNvSpPr txBox="1"/>
           <p:nvPr/>
         </p:nvSpPr>
@@ -23447,7 +25062,7 @@
       </p:sp>
       <p:sp>
         <p:nvSpPr>
-          <p:cNvPr id="49" name="text-258"/>
+          <p:cNvPr id="49" name="text-260"/>
           <p:cNvSpPr txBox="1"/>
           <p:nvPr/>
         </p:nvSpPr>
@@ -23483,7 +25098,7 @@
       </p:sp>
       <p:sp>
         <p:nvSpPr>
-          <p:cNvPr id="50" name="text-259"/>
+          <p:cNvPr id="50" name="text-261"/>
           <p:cNvSpPr txBox="1"/>
           <p:nvPr/>
         </p:nvSpPr>
@@ -23633,7 +25248,7 @@
       </p:sp>
       <p:sp>
         <p:nvSpPr>
-          <p:cNvPr id="51" name="text-260"/>
+          <p:cNvPr id="51" name="text-262"/>
           <p:cNvSpPr txBox="1"/>
           <p:nvPr/>
         </p:nvSpPr>
@@ -23669,7 +25284,7 @@
       </p:sp>
       <p:sp>
         <p:nvSpPr>
-          <p:cNvPr id="52" name="text-261"/>
+          <p:cNvPr id="52" name="text-263"/>
           <p:cNvSpPr txBox="1"/>
           <p:nvPr/>
         </p:nvSpPr>
@@ -23800,7 +25415,7 @@
             <a:pPr algn="r"/>
             <a:fld id="{F7021451-1387-4CA6-816F-3879F97B5CBC}" type="slidenum">
               <a:rPr b="0" lang="en-US"/>
-              <a:t>15</a:t>
+              <a:t>16</a:t>
             </a:fld>
             <a:endParaRPr lang="en-US"/>
           </a:p>
@@ -23814,9 +25429,9 @@
 </p:sld>
 </file>
 
-<file path=ppt/slides/slide16.xml><?xml version="1.0" encoding="utf-8"?>
+<file path=ppt/slides/slide17.xml><?xml version="1.0" encoding="utf-8"?>
 <p:sld xmlns:a="http://schemas.openxmlformats.org/drawingml/2006/main" xmlns:r="http://schemas.openxmlformats.org/officeDocument/2006/relationships" xmlns:p="http://schemas.openxmlformats.org/presentationml/2006/main">
-  <p:cSld name="Slide 16">
+  <p:cSld name="Slide 17">
     <p:spTree>
       <p:nvGrpSpPr>
         <p:cNvPr id="1" name=""/>
@@ -23871,7 +25486,7 @@
       </p:sp>
       <p:sp>
         <p:nvSpPr>
-          <p:cNvPr id="3" name="kicker-262"/>
+          <p:cNvPr id="3" name="kicker-264"/>
           <p:cNvSpPr txBox="1"/>
           <p:nvPr/>
         </p:nvSpPr>
@@ -23907,7 +25522,7 @@
       </p:sp>
       <p:sp>
         <p:nvSpPr>
-          <p:cNvPr id="5" name="card-263"/>
+          <p:cNvPr id="5" name="card-265"/>
           <p:cNvSpPr/>
           <p:nvPr/>
         </p:nvSpPr>
@@ -23934,7 +25549,7 @@
       </p:sp>
       <p:sp>
         <p:nvSpPr>
-          <p:cNvPr id="6" name="step-dot-264"/>
+          <p:cNvPr id="6" name="step-dot-266"/>
           <p:cNvSpPr/>
           <p:nvPr/>
         </p:nvSpPr>
@@ -23959,7 +25574,7 @@
       </p:sp>
       <p:sp>
         <p:nvSpPr>
-          <p:cNvPr id="7" name="text-265"/>
+          <p:cNvPr id="7" name="text-267"/>
           <p:cNvSpPr txBox="1"/>
           <p:nvPr/>
         </p:nvSpPr>
@@ -23995,7 +25610,7 @@
       </p:sp>
       <p:sp>
         <p:nvSpPr>
-          <p:cNvPr id="8" name="text-266"/>
+          <p:cNvPr id="8" name="text-268"/>
           <p:cNvSpPr txBox="1"/>
           <p:nvPr/>
         </p:nvSpPr>
@@ -24031,7 +25646,7 @@
       </p:sp>
       <p:sp>
         <p:nvSpPr>
-          <p:cNvPr id="9" name="text-267"/>
+          <p:cNvPr id="9" name="text-269"/>
           <p:cNvSpPr txBox="1"/>
           <p:nvPr/>
         </p:nvSpPr>
@@ -24067,7 +25682,7 @@
       </p:sp>
       <p:sp>
         <p:nvSpPr>
-          <p:cNvPr id="10" name="card-268"/>
+          <p:cNvPr id="10" name="card-270"/>
           <p:cNvSpPr/>
           <p:nvPr/>
         </p:nvSpPr>
@@ -24094,7 +25709,7 @@
       </p:sp>
       <p:sp>
         <p:nvSpPr>
-          <p:cNvPr id="11" name="step-dot-269"/>
+          <p:cNvPr id="11" name="step-dot-271"/>
           <p:cNvSpPr/>
           <p:nvPr/>
         </p:nvSpPr>
@@ -24119,7 +25734,7 @@
       </p:sp>
       <p:sp>
         <p:nvSpPr>
-          <p:cNvPr id="12" name="text-270"/>
+          <p:cNvPr id="12" name="text-272"/>
           <p:cNvSpPr txBox="1"/>
           <p:nvPr/>
         </p:nvSpPr>
@@ -24155,7 +25770,7 @@
       </p:sp>
       <p:sp>
         <p:nvSpPr>
-          <p:cNvPr id="13" name="text-271"/>
+          <p:cNvPr id="13" name="text-273"/>
           <p:cNvSpPr txBox="1"/>
           <p:nvPr/>
         </p:nvSpPr>
@@ -24191,7 +25806,7 @@
       </p:sp>
       <p:sp>
         <p:nvSpPr>
-          <p:cNvPr id="14" name="text-272"/>
+          <p:cNvPr id="14" name="text-274"/>
           <p:cNvSpPr txBox="1"/>
           <p:nvPr/>
         </p:nvSpPr>
@@ -24227,7 +25842,7 @@
       </p:sp>
       <p:sp>
         <p:nvSpPr>
-          <p:cNvPr id="15" name="card-273"/>
+          <p:cNvPr id="15" name="card-275"/>
           <p:cNvSpPr/>
           <p:nvPr/>
         </p:nvSpPr>
@@ -24254,7 +25869,7 @@
       </p:sp>
       <p:sp>
         <p:nvSpPr>
-          <p:cNvPr id="16" name="step-dot-274"/>
+          <p:cNvPr id="16" name="step-dot-276"/>
           <p:cNvSpPr/>
           <p:nvPr/>
         </p:nvSpPr>
@@ -24279,7 +25894,7 @@
       </p:sp>
       <p:sp>
         <p:nvSpPr>
-          <p:cNvPr id="17" name="text-275"/>
+          <p:cNvPr id="17" name="text-277"/>
           <p:cNvSpPr txBox="1"/>
           <p:nvPr/>
         </p:nvSpPr>
@@ -24315,7 +25930,7 @@
       </p:sp>
       <p:sp>
         <p:nvSpPr>
-          <p:cNvPr id="18" name="text-276"/>
+          <p:cNvPr id="18" name="text-278"/>
           <p:cNvSpPr txBox="1"/>
           <p:nvPr/>
         </p:nvSpPr>
@@ -24351,7 +25966,7 @@
       </p:sp>
       <p:sp>
         <p:nvSpPr>
-          <p:cNvPr id="19" name="text-277"/>
+          <p:cNvPr id="19" name="text-279"/>
           <p:cNvSpPr txBox="1"/>
           <p:nvPr/>
         </p:nvSpPr>
@@ -24387,7 +26002,7 @@
       </p:sp>
       <p:sp>
         <p:nvSpPr>
-          <p:cNvPr id="20" name="card-278"/>
+          <p:cNvPr id="20" name="card-280"/>
           <p:cNvSpPr/>
           <p:nvPr/>
         </p:nvSpPr>
@@ -24414,7 +26029,7 @@
       </p:sp>
       <p:sp>
         <p:nvSpPr>
-          <p:cNvPr id="21" name="step-dot-279"/>
+          <p:cNvPr id="21" name="step-dot-281"/>
           <p:cNvSpPr/>
           <p:nvPr/>
         </p:nvSpPr>
@@ -24439,7 +26054,7 @@
       </p:sp>
       <p:sp>
         <p:nvSpPr>
-          <p:cNvPr id="22" name="text-280"/>
+          <p:cNvPr id="22" name="text-282"/>
           <p:cNvSpPr txBox="1"/>
           <p:nvPr/>
         </p:nvSpPr>
@@ -24475,7 +26090,7 @@
       </p:sp>
       <p:sp>
         <p:nvSpPr>
-          <p:cNvPr id="23" name="text-281"/>
+          <p:cNvPr id="23" name="text-283"/>
           <p:cNvSpPr txBox="1"/>
           <p:nvPr/>
         </p:nvSpPr>
@@ -24511,7 +26126,7 @@
       </p:sp>
       <p:sp>
         <p:nvSpPr>
-          <p:cNvPr id="24" name="text-282"/>
+          <p:cNvPr id="24" name="text-284"/>
           <p:cNvSpPr txBox="1"/>
           <p:nvPr/>
         </p:nvSpPr>
@@ -24547,7 +26162,7 @@
       </p:sp>
       <p:sp>
         <p:nvSpPr>
-          <p:cNvPr id="25" name="card-283"/>
+          <p:cNvPr id="25" name="card-285"/>
           <p:cNvSpPr/>
           <p:nvPr/>
         </p:nvSpPr>
@@ -24574,7 +26189,7 @@
       </p:sp>
       <p:sp>
         <p:nvSpPr>
-          <p:cNvPr id="26" name="step-dot-284"/>
+          <p:cNvPr id="26" name="step-dot-286"/>
           <p:cNvSpPr/>
           <p:nvPr/>
         </p:nvSpPr>
@@ -24599,7 +26214,7 @@
       </p:sp>
       <p:sp>
         <p:nvSpPr>
-          <p:cNvPr id="27" name="text-285"/>
+          <p:cNvPr id="27" name="text-287"/>
           <p:cNvSpPr txBox="1"/>
           <p:nvPr/>
         </p:nvSpPr>
@@ -24635,7 +26250,7 @@
       </p:sp>
       <p:sp>
         <p:nvSpPr>
-          <p:cNvPr id="28" name="text-286"/>
+          <p:cNvPr id="28" name="text-288"/>
           <p:cNvSpPr txBox="1"/>
           <p:nvPr/>
         </p:nvSpPr>
@@ -24671,7 +26286,7 @@
       </p:sp>
       <p:sp>
         <p:nvSpPr>
-          <p:cNvPr id="29" name="text-287"/>
+          <p:cNvPr id="29" name="text-289"/>
           <p:cNvSpPr txBox="1"/>
           <p:nvPr/>
         </p:nvSpPr>
@@ -24707,7 +26322,7 @@
       </p:sp>
       <p:sp>
         <p:nvSpPr>
-          <p:cNvPr id="30" name="card-288"/>
+          <p:cNvPr id="30" name="card-290"/>
           <p:cNvSpPr/>
           <p:nvPr/>
         </p:nvSpPr>
@@ -24734,7 +26349,7 @@
       </p:sp>
       <p:sp>
         <p:nvSpPr>
-          <p:cNvPr id="31" name="step-dot-289"/>
+          <p:cNvPr id="31" name="step-dot-291"/>
           <p:cNvSpPr/>
           <p:nvPr/>
         </p:nvSpPr>
@@ -24759,7 +26374,7 @@
       </p:sp>
       <p:sp>
         <p:nvSpPr>
-          <p:cNvPr id="32" name="text-290"/>
+          <p:cNvPr id="32" name="text-292"/>
           <p:cNvSpPr txBox="1"/>
           <p:nvPr/>
         </p:nvSpPr>
@@ -24795,7 +26410,7 @@
       </p:sp>
       <p:sp>
         <p:nvSpPr>
-          <p:cNvPr id="33" name="text-291"/>
+          <p:cNvPr id="33" name="text-293"/>
           <p:cNvSpPr txBox="1"/>
           <p:nvPr/>
         </p:nvSpPr>
@@ -24831,7 +26446,7 @@
       </p:sp>
       <p:sp>
         <p:nvSpPr>
-          <p:cNvPr id="34" name="text-292"/>
+          <p:cNvPr id="34" name="text-294"/>
           <p:cNvSpPr txBox="1"/>
           <p:nvPr/>
         </p:nvSpPr>
@@ -24867,7 +26482,7 @@
       </p:sp>
       <p:sp>
         <p:nvSpPr>
-          <p:cNvPr id="35" name="card-293"/>
+          <p:cNvPr id="35" name="card-295"/>
           <p:cNvSpPr/>
           <p:nvPr/>
         </p:nvSpPr>
@@ -24894,7 +26509,7 @@
       </p:sp>
       <p:sp>
         <p:nvSpPr>
-          <p:cNvPr id="36" name="step-dot-294"/>
+          <p:cNvPr id="36" name="step-dot-296"/>
           <p:cNvSpPr/>
           <p:nvPr/>
         </p:nvSpPr>
@@ -24919,7 +26534,7 @@
       </p:sp>
       <p:sp>
         <p:nvSpPr>
-          <p:cNvPr id="37" name="text-295"/>
+          <p:cNvPr id="37" name="text-297"/>
           <p:cNvSpPr txBox="1"/>
           <p:nvPr/>
         </p:nvSpPr>
@@ -24955,7 +26570,7 @@
       </p:sp>
       <p:sp>
         <p:nvSpPr>
-          <p:cNvPr id="38" name="text-296"/>
+          <p:cNvPr id="38" name="text-298"/>
           <p:cNvSpPr txBox="1"/>
           <p:nvPr/>
         </p:nvSpPr>
@@ -24991,7 +26606,7 @@
       </p:sp>
       <p:sp>
         <p:nvSpPr>
-          <p:cNvPr id="39" name="text-297"/>
+          <p:cNvPr id="39" name="text-299"/>
           <p:cNvSpPr txBox="1"/>
           <p:nvPr/>
         </p:nvSpPr>
@@ -25027,7 +26642,7 @@
       </p:sp>
       <p:sp>
         <p:nvSpPr>
-          <p:cNvPr id="40" name="card-298"/>
+          <p:cNvPr id="40" name="card-300"/>
           <p:cNvSpPr/>
           <p:nvPr/>
         </p:nvSpPr>
@@ -25054,7 +26669,7 @@
       </p:sp>
       <p:sp>
         <p:nvSpPr>
-          <p:cNvPr id="41" name="step-dot-299"/>
+          <p:cNvPr id="41" name="step-dot-301"/>
           <p:cNvSpPr/>
           <p:nvPr/>
         </p:nvSpPr>
@@ -25079,7 +26694,7 @@
       </p:sp>
       <p:sp>
         <p:nvSpPr>
-          <p:cNvPr id="42" name="text-300"/>
+          <p:cNvPr id="42" name="text-302"/>
           <p:cNvSpPr txBox="1"/>
           <p:nvPr/>
         </p:nvSpPr>
@@ -25115,7 +26730,7 @@
       </p:sp>
       <p:sp>
         <p:nvSpPr>
-          <p:cNvPr id="43" name="text-301"/>
+          <p:cNvPr id="43" name="text-303"/>
           <p:cNvSpPr txBox="1"/>
           <p:nvPr/>
         </p:nvSpPr>
@@ -25151,7 +26766,7 @@
       </p:sp>
       <p:sp>
         <p:nvSpPr>
-          <p:cNvPr id="44" name="text-302"/>
+          <p:cNvPr id="44" name="text-304"/>
           <p:cNvSpPr txBox="1"/>
           <p:nvPr/>
         </p:nvSpPr>
@@ -25187,7 +26802,7 @@
       </p:sp>
       <p:sp>
         <p:nvSpPr>
-          <p:cNvPr id="45" name="text-303"/>
+          <p:cNvPr id="45" name="text-305"/>
           <p:cNvSpPr txBox="1"/>
           <p:nvPr/>
         </p:nvSpPr>
@@ -25248,7 +26863,7 @@
       </p:sp>
       <p:sp>
         <p:nvSpPr>
-          <p:cNvPr id="47" name="text-304"/>
+          <p:cNvPr id="47" name="text-306"/>
           <p:cNvSpPr txBox="1"/>
           <p:nvPr/>
         </p:nvSpPr>
@@ -25295,7 +26910,7 @@
       </p:sp>
       <p:sp>
         <p:nvSpPr>
-          <p:cNvPr id="48" name="text-305"/>
+          <p:cNvPr id="48" name="text-307"/>
           <p:cNvSpPr txBox="1"/>
           <p:nvPr/>
         </p:nvSpPr>
@@ -25356,7 +26971,7 @@
       </p:sp>
       <p:sp>
         <p:nvSpPr>
-          <p:cNvPr id="50" name="text-306"/>
+          <p:cNvPr id="50" name="text-308"/>
           <p:cNvSpPr txBox="1"/>
           <p:nvPr/>
         </p:nvSpPr>
@@ -25403,7 +27018,7 @@
       </p:sp>
       <p:sp>
         <p:nvSpPr>
-          <p:cNvPr id="51" name="text-307"/>
+          <p:cNvPr id="51" name="text-309"/>
           <p:cNvSpPr txBox="1"/>
           <p:nvPr/>
         </p:nvSpPr>
@@ -25464,7 +27079,7 @@
       </p:sp>
       <p:sp>
         <p:nvSpPr>
-          <p:cNvPr id="53" name="text-308"/>
+          <p:cNvPr id="53" name="text-310"/>
           <p:cNvSpPr txBox="1"/>
           <p:nvPr/>
         </p:nvSpPr>
@@ -25511,7 +27126,7 @@
       </p:sp>
       <p:sp>
         <p:nvSpPr>
-          <p:cNvPr id="54" name="text-309"/>
+          <p:cNvPr id="54" name="text-311"/>
           <p:cNvSpPr txBox="1"/>
           <p:nvPr/>
         </p:nvSpPr>
@@ -25572,7 +27187,7 @@
       </p:sp>
       <p:sp>
         <p:nvSpPr>
-          <p:cNvPr id="56" name="text-310"/>
+          <p:cNvPr id="56" name="text-312"/>
           <p:cNvSpPr txBox="1"/>
           <p:nvPr/>
         </p:nvSpPr>
@@ -25619,7 +27234,7 @@
       </p:sp>
       <p:sp>
         <p:nvSpPr>
-          <p:cNvPr id="57" name="text-311"/>
+          <p:cNvPr id="57" name="text-313"/>
           <p:cNvSpPr txBox="1"/>
           <p:nvPr/>
         </p:nvSpPr>
@@ -25692,7 +27307,7 @@
             <a:pPr algn="r"/>
             <a:fld id="{F7021451-1387-4CA6-816F-3879F97B5CBC}" type="slidenum">
               <a:rPr b="0" lang="en-US"/>
-              <a:t>16</a:t>
+              <a:t>17</a:t>
             </a:fld>
             <a:endParaRPr lang="en-US"/>
           </a:p>
@@ -27818,7 +29433,7 @@
                   <a:schemeClr val="tx1"/>
                 </a:solidFill>
               </a:rPr>
-              <a:t>Round 2: the crash changed everything</a:t>
+              <a:t>The crash changed everything</a:t>
             </a:r>
             <a:endParaRPr lang="en-US" sz="2800" dirty="0"/>
           </a:p>
@@ -28476,7 +30091,7 @@
                   <a:schemeClr val="tx1"/>
                 </a:solidFill>
               </a:rPr>
-              <a:t>Round 3: how much we bet each day</a:t>
+              <a:t>Round 3: our causal engine decides the bet</a:t>
             </a:r>
             <a:endParaRPr lang="en-US" sz="2800" dirty="0"/>
           </a:p>
@@ -29051,7 +30666,7 @@
                   <a:schemeClr val="tx1"/>
                 </a:solidFill>
               </a:rPr>
-              <a:t>Round 3 result: we protected the money</a:t>
+              <a:t>Causal engine result: we protected the money</a:t>
             </a:r>
             <a:endParaRPr lang="en-US" sz="2800" dirty="0"/>
           </a:p>
@@ -29163,13 +30778,13 @@
             <a:r>
               <a:rPr lang="en-US" sz="4000" b="1" dirty="0">
                 <a:solidFill>
-                  <a:schemeClr val="accent5"/>
+                  <a:schemeClr val="accent1"/>
                 </a:solidFill>
                 <a:latin typeface="Cambria" pitchFamily="34" charset="0"/>
                 <a:ea typeface="Cambria" pitchFamily="34" charset="-122"/>
                 <a:cs typeface="Cambria" pitchFamily="34" charset="-120"/>
               </a:rPr>
-              <a:t>+3.7%</a:t>
+              <a:t>−2.2%</a:t>
             </a:r>
             <a:endParaRPr lang="en-US" sz="4000" dirty="0"/>
           </a:p>
@@ -29205,7 +30820,7 @@
                   <a:schemeClr val="tx1"/>
                 </a:solidFill>
               </a:rPr>
-              <a:t>Our return</a:t>
+              <a:t>Causal engine return</a:t>
             </a:r>
             <a:endParaRPr lang="en-US" sz="1300" dirty="0"/>
           </a:p>
@@ -29241,7 +30856,7 @@
                   <a:srgbClr val="55666E"/>
                 </a:solidFill>
               </a:rPr>
-              <a:t>Holding: −49.0%</a:t>
+              <a:t>Holding: −46.5%</a:t>
             </a:r>
             <a:endParaRPr lang="en-US" sz="1150" dirty="0"/>
           </a:p>
@@ -29307,7 +30922,7 @@
                 <a:ea typeface="Cambria" pitchFamily="34" charset="-122"/>
                 <a:cs typeface="Cambria" pitchFamily="34" charset="-120"/>
               </a:rPr>
-              <a:t>-4.4%</a:t>
+              <a:t>-6.6%</a:t>
             </a:r>
             <a:endParaRPr lang="en-US" sz="4000" dirty="0"/>
           </a:p>
@@ -29799,7 +31414,7 @@
                   <a:srgbClr val="55666E"/>
                 </a:solidFill>
               </a:rPr>
-              <a:t>Works out the hidden close price from order_flow</a:t>
+              <a:t>Causal LR + HistGB model with a crash adjustment</a:t>
             </a:r>
             <a:endParaRPr lang="en-US" sz="1250" dirty="0"/>
           </a:p>
@@ -29862,7 +31477,7 @@
                   <a:schemeClr val="accent2"/>
                 </a:solidFill>
               </a:rPr>
-              <a:t>Round 3</a:t>
+              <a:t>Round 3 · causal engine</a:t>
             </a:r>
             <a:endParaRPr lang="en-US" sz="1200" dirty="0"/>
           </a:p>
@@ -30122,7 +31737,7 @@
                   <a:schemeClr val="tx1"/>
                 </a:solidFill>
               </a:rPr>
-              <a:t>Round 2 used the next day's price, so we rebuilt Round 3 to use only past data, and the code checks it.</a:t>
+              <a:t>our final Round 3 upload (generate_round3_100.py) used the next day's price. The causal engine above does not, and the code checks it.</a:t>
             </a:r>
             <a:endParaRPr lang="en-US" sz="1350" dirty="0"/>
           </a:p>
